--- a/presentacion/Presentacion_Proyecto_Integrador.pptx
+++ b/presentacion/Presentacion_Proyecto_Integrador.pptx
@@ -35,6 +35,7 @@
     <p:sldId id="283" r:id="rId34"/>
     <p:sldId id="284" r:id="rId35"/>
     <p:sldId id="285" r:id="rId36"/>
+    <p:sldId id="286" r:id="rId37"/>
   </p:sldIdLst>
   <p:sldSz cx="12191695" cy="6858000" type="screen4x3"/>
   <p:notesSz cx="6858000" cy="9144000"/>
@@ -3396,7 +3397,7 @@
                 </a:solidFill>
                 <a:latin typeface="Arial"/>
               </a:rPr>
-              <a:t>El particionado por año permite descartar directorios</a:t>
+              <a:t>MapReduce sobre RDD frente a DataFrames</a:t>
             </a:r>
           </a:p>
         </p:txBody>
@@ -3447,7 +3448,7 @@
       </p:sp>
       <p:pic>
         <p:nvPicPr>
-          <p:cNvPr id="5" name="Picture 4" descr="f15_shuffle.png"/>
+          <p:cNvPr id="5" name="Picture 4" descr="f14_rdd_vs_dataframe.png"/>
           <p:cNvPicPr>
             <a:picLocks noChangeAspect="1"/>
           </p:cNvPicPr>
@@ -3461,8 +3462,8 @@
         </p:blipFill>
         <p:spPr>
           <a:xfrm>
-            <a:off x="2058250" y="1508760"/>
-            <a:ext cx="8045018" cy="4160520"/>
+            <a:off x="2589312" y="1508760"/>
+            <a:ext cx="6982895" cy="4160520"/>
           </a:xfrm>
           <a:prstGeom prst="rect">
             <a:avLst/>
@@ -3503,7 +3504,7 @@
                 </a:solidFill>
                 <a:latin typeface="Arial"/>
               </a:rPr>
-              <a:t>La ejecución adaptativa amortigua casi por completo una mala elección del número de particiones de barajado.</a:t>
+              <a:t>El mismo resultado, verificado con exceptAll en ambos sentidos, cuesta tres veces más en RDD por la serialización hacia Python.</a:t>
             </a:r>
           </a:p>
         </p:txBody>
@@ -3599,7 +3600,7 @@
                 </a:solidFill>
                 <a:latin typeface="Arial"/>
               </a:rPr>
-              <a:t>Parte II · Similitud</a:t>
+              <a:t>Parte I · Spark</a:t>
             </a:r>
           </a:p>
         </p:txBody>
@@ -3638,7 +3639,7 @@
                 </a:solidFill>
                 <a:latin typeface="Arial"/>
               </a:rPr>
-              <a:t>El tamaño del shingle no se optimiza, se fija con un criterio</a:t>
+              <a:t>El particionado por año permite descartar directorios</a:t>
             </a:r>
           </a:p>
         </p:txBody>
@@ -3689,7 +3690,7 @@
       </p:sp>
       <p:pic>
         <p:nvPicPr>
-          <p:cNvPr id="5" name="Picture 4" descr="f16_calibracion_k.png"/>
+          <p:cNvPr id="5" name="Picture 4" descr="f15_shuffle.png"/>
           <p:cNvPicPr>
             <a:picLocks noChangeAspect="1"/>
           </p:cNvPicPr>
@@ -3703,8 +3704,8 @@
         </p:blipFill>
         <p:spPr>
           <a:xfrm>
-            <a:off x="2361296" y="1508760"/>
-            <a:ext cx="7438926" cy="4160520"/>
+            <a:off x="2058250" y="1508760"/>
+            <a:ext cx="8045018" cy="4160520"/>
           </a:xfrm>
           <a:prstGeom prst="rect">
             <a:avLst/>
@@ -3745,7 +3746,7 @@
                 </a:solidFill>
                 <a:latin typeface="Arial"/>
               </a:rPr>
-              <a:t>Las dos curvas bajan juntas, así que se toma el k más pequeño que deja el fondo de pares no relacionados por debajo de 0,02.</a:t>
+              <a:t>La ejecución adaptativa amortigua casi por completo una mala elección del número de particiones de barajado.</a:t>
             </a:r>
           </a:p>
         </p:txBody>
@@ -3841,7 +3842,7 @@
                 </a:solidFill>
                 <a:latin typeface="Arial"/>
               </a:rPr>
-              <a:t>Parte II · MinHash</a:t>
+              <a:t>Parte II · Similitud</a:t>
             </a:r>
           </a:p>
         </p:txBody>
@@ -3880,7 +3881,7 @@
                 </a:solidFill>
                 <a:latin typeface="Arial"/>
               </a:rPr>
-              <a:t>El error baja como uno sobre la raíz de n</a:t>
+              <a:t>El tamaño del shingle no se optimiza, se fija con un criterio</a:t>
             </a:r>
           </a:p>
         </p:txBody>
@@ -3931,7 +3932,7 @@
       </p:sp>
       <p:pic>
         <p:nvPicPr>
-          <p:cNvPr id="5" name="Picture 4" descr="f18_error_minhash.png"/>
+          <p:cNvPr id="5" name="Picture 4" descr="f16_calibracion_k.png"/>
           <p:cNvPicPr>
             <a:picLocks noChangeAspect="1"/>
           </p:cNvPicPr>
@@ -3945,8 +3946,8 @@
         </p:blipFill>
         <p:spPr>
           <a:xfrm>
-            <a:off x="2542902" y="1508760"/>
-            <a:ext cx="7075714" cy="4160520"/>
+            <a:off x="2361296" y="1508760"/>
+            <a:ext cx="7438926" cy="4160520"/>
           </a:xfrm>
           <a:prstGeom prst="rect">
             <a:avLst/>
@@ -3987,7 +3988,7 @@
                 </a:solidFill>
                 <a:latin typeface="Arial"/>
               </a:rPr>
-              <a:t>Cuadruplicar las funciones hash solo divide el error entre dos, y con 128 ya queda por debajo del ancho de decisión de LSH.</a:t>
+              <a:t>Las dos curvas bajan juntas, así que se toma el k más pequeño que deja el fondo de pares no relacionados por debajo de 0,02.</a:t>
             </a:r>
           </a:p>
         </p:txBody>
@@ -4083,7 +4084,7 @@
                 </a:solidFill>
                 <a:latin typeface="Arial"/>
               </a:rPr>
-              <a:t>Parte II · LSH</a:t>
+              <a:t>Parte II · MinHash</a:t>
             </a:r>
           </a:p>
         </p:txBody>
@@ -4122,7 +4123,7 @@
                 </a:solidFill>
                 <a:latin typeface="Arial"/>
               </a:rPr>
-              <a:t>Las bandas y las filas definen qué se considera parecido</a:t>
+              <a:t>El error baja como uno sobre la raíz de n</a:t>
             </a:r>
           </a:p>
         </p:txBody>
@@ -4173,7 +4174,7 @@
       </p:sp>
       <p:pic>
         <p:nvPicPr>
-          <p:cNvPr id="5" name="Picture 4" descr="f19_curva_s.png"/>
+          <p:cNvPr id="5" name="Picture 4" descr="f18_error_minhash.png"/>
           <p:cNvPicPr>
             <a:picLocks noChangeAspect="1"/>
           </p:cNvPicPr>
@@ -4187,8 +4188,8 @@
         </p:blipFill>
         <p:spPr>
           <a:xfrm>
-            <a:off x="2395154" y="1508760"/>
-            <a:ext cx="7371210" cy="4160520"/>
+            <a:off x="2542902" y="1508760"/>
+            <a:ext cx="7075714" cy="4160520"/>
           </a:xfrm>
           <a:prstGeom prst="rect">
             <a:avLst/>
@@ -4229,7 +4230,7 @@
                 </a:solidFill>
                 <a:latin typeface="Arial"/>
               </a:rPr>
-              <a:t>El umbral teórico marca el cambio de concavidad de la curva, donde la probabilidad vale 1 menos 1 sobre e y no un medio.</a:t>
+              <a:t>Cuadruplicar las funciones hash solo divide el error entre dos, y con 128 ya queda por debajo del ancho de decisión de LSH.</a:t>
             </a:r>
           </a:p>
         </p:txBody>
@@ -4282,6 +4283,248 @@
 </file>
 
 <file path=ppt/slides/slide14.xml><?xml version="1.0" encoding="utf-8"?>
+<p:sld xmlns:a="http://schemas.openxmlformats.org/drawingml/2006/main" xmlns:p="http://schemas.openxmlformats.org/presentationml/2006/main" xmlns:r="http://schemas.openxmlformats.org/officeDocument/2006/relationships">
+  <p:cSld>
+    <p:spTree>
+      <p:nvGrpSpPr>
+        <p:cNvPr id="1" name=""/>
+        <p:cNvGrpSpPr/>
+        <p:nvPr/>
+      </p:nvGrpSpPr>
+      <p:grpSpPr/>
+      <p:sp>
+        <p:nvSpPr>
+          <p:cNvPr id="2" name="TextBox 1"/>
+          <p:cNvSpPr txBox="1"/>
+          <p:nvPr/>
+        </p:nvSpPr>
+        <p:spPr>
+          <a:xfrm>
+            <a:off x="548640" y="274320"/>
+            <a:ext cx="11064240" cy="292608"/>
+          </a:xfrm>
+          <a:prstGeom prst="rect">
+            <a:avLst/>
+          </a:prstGeom>
+          <a:noFill/>
+        </p:spPr>
+        <p:txBody>
+          <a:bodyPr wrap="square" anchor="t">
+            <a:spAutoFit/>
+          </a:bodyPr>
+          <a:lstStyle/>
+          <a:p>
+            <a:pPr algn="l">
+              <a:lnSpc>
+                <a:spcPct val="115000"/>
+              </a:lnSpc>
+            </a:pPr>
+            <a:r>
+              <a:rPr sz="1200" b="0">
+                <a:solidFill>
+                  <a:srgbClr val="000000"/>
+                </a:solidFill>
+                <a:latin typeface="Arial"/>
+              </a:rPr>
+              <a:t>Parte II · LSH</a:t>
+            </a:r>
+          </a:p>
+        </p:txBody>
+      </p:sp>
+      <p:sp>
+        <p:nvSpPr>
+          <p:cNvPr id="3" name="TextBox 2"/>
+          <p:cNvSpPr txBox="1"/>
+          <p:nvPr/>
+        </p:nvSpPr>
+        <p:spPr>
+          <a:xfrm>
+            <a:off x="548640" y="566928"/>
+            <a:ext cx="11064240" cy="731520"/>
+          </a:xfrm>
+          <a:prstGeom prst="rect">
+            <a:avLst/>
+          </a:prstGeom>
+          <a:noFill/>
+        </p:spPr>
+        <p:txBody>
+          <a:bodyPr wrap="square" anchor="t">
+            <a:spAutoFit/>
+          </a:bodyPr>
+          <a:lstStyle/>
+          <a:p>
+            <a:pPr algn="l">
+              <a:lnSpc>
+                <a:spcPct val="115000"/>
+              </a:lnSpc>
+            </a:pPr>
+            <a:r>
+              <a:rPr sz="2600" b="1">
+                <a:solidFill>
+                  <a:srgbClr val="000000"/>
+                </a:solidFill>
+                <a:latin typeface="Arial"/>
+              </a:rPr>
+              <a:t>Las bandas y las filas definen qué se considera parecido</a:t>
+            </a:r>
+          </a:p>
+        </p:txBody>
+      </p:sp>
+      <p:sp>
+        <p:nvSpPr>
+          <p:cNvPr id="4" name="Rectangle 3"/>
+          <p:cNvSpPr/>
+          <p:nvPr/>
+        </p:nvSpPr>
+        <p:spPr>
+          <a:xfrm>
+            <a:off x="548640" y="1298448"/>
+            <a:ext cx="11064240" cy="11430"/>
+          </a:xfrm>
+          <a:prstGeom prst="rect">
+            <a:avLst/>
+          </a:prstGeom>
+          <a:solidFill>
+            <a:srgbClr val="BBBBBB"/>
+          </a:solidFill>
+          <a:ln>
+            <a:noFill/>
+          </a:ln>
+          <a:effectLst/>
+        </p:spPr>
+        <p:style>
+          <a:lnRef idx="1">
+            <a:schemeClr val="accent1"/>
+          </a:lnRef>
+          <a:fillRef idx="3">
+            <a:schemeClr val="accent1"/>
+          </a:fillRef>
+          <a:effectRef idx="2">
+            <a:schemeClr val="accent1"/>
+          </a:effectRef>
+          <a:fontRef idx="minor">
+            <a:schemeClr val="lt1"/>
+          </a:fontRef>
+        </p:style>
+        <p:txBody>
+          <a:bodyPr rtlCol="0" anchor="ctr"/>
+          <a:lstStyle/>
+          <a:p>
+            <a:pPr algn="ctr"/>
+          </a:p>
+        </p:txBody>
+      </p:sp>
+      <p:pic>
+        <p:nvPicPr>
+          <p:cNvPr id="5" name="Picture 4" descr="f19_curva_s.png"/>
+          <p:cNvPicPr>
+            <a:picLocks noChangeAspect="1"/>
+          </p:cNvPicPr>
+          <p:nvPr/>
+        </p:nvPicPr>
+        <p:blipFill>
+          <a:blip r:embed="rId2"/>
+          <a:stretch>
+            <a:fillRect/>
+          </a:stretch>
+        </p:blipFill>
+        <p:spPr>
+          <a:xfrm>
+            <a:off x="2395154" y="1508760"/>
+            <a:ext cx="7371210" cy="4160520"/>
+          </a:xfrm>
+          <a:prstGeom prst="rect">
+            <a:avLst/>
+          </a:prstGeom>
+        </p:spPr>
+      </p:pic>
+      <p:sp>
+        <p:nvSpPr>
+          <p:cNvPr id="6" name="TextBox 5"/>
+          <p:cNvSpPr txBox="1"/>
+          <p:nvPr/>
+        </p:nvSpPr>
+        <p:spPr>
+          <a:xfrm>
+            <a:off x="548640" y="5806440"/>
+            <a:ext cx="11064240" cy="777240"/>
+          </a:xfrm>
+          <a:prstGeom prst="rect">
+            <a:avLst/>
+          </a:prstGeom>
+          <a:noFill/>
+        </p:spPr>
+        <p:txBody>
+          <a:bodyPr wrap="square" anchor="t">
+            <a:spAutoFit/>
+          </a:bodyPr>
+          <a:lstStyle/>
+          <a:p>
+            <a:pPr algn="l">
+              <a:lnSpc>
+                <a:spcPct val="115000"/>
+              </a:lnSpc>
+            </a:pPr>
+            <a:r>
+              <a:rPr sz="1500" b="0">
+                <a:solidFill>
+                  <a:srgbClr val="000000"/>
+                </a:solidFill>
+                <a:latin typeface="Arial"/>
+              </a:rPr>
+              <a:t>El umbral teórico marca el cambio de concavidad de la curva, donde la probabilidad vale 1 menos 1 sobre e y no un medio.</a:t>
+            </a:r>
+          </a:p>
+        </p:txBody>
+      </p:sp>
+      <p:sp>
+        <p:nvSpPr>
+          <p:cNvPr id="7" name="TextBox 6"/>
+          <p:cNvSpPr txBox="1"/>
+          <p:nvPr/>
+        </p:nvSpPr>
+        <p:spPr>
+          <a:xfrm>
+            <a:off x="11430000" y="6355080"/>
+            <a:ext cx="548640" cy="274320"/>
+          </a:xfrm>
+          <a:prstGeom prst="rect">
+            <a:avLst/>
+          </a:prstGeom>
+          <a:noFill/>
+        </p:spPr>
+        <p:txBody>
+          <a:bodyPr wrap="square" anchor="t">
+            <a:spAutoFit/>
+          </a:bodyPr>
+          <a:lstStyle/>
+          <a:p>
+            <a:pPr algn="l">
+              <a:lnSpc>
+                <a:spcPct val="115000"/>
+              </a:lnSpc>
+            </a:pPr>
+            <a:r>
+              <a:rPr sz="1000" b="0">
+                <a:solidFill>
+                  <a:srgbClr val="000000"/>
+                </a:solidFill>
+                <a:latin typeface="Arial"/>
+              </a:rPr>
+              <a:t>13</a:t>
+            </a:r>
+          </a:p>
+        </p:txBody>
+      </p:sp>
+    </p:spTree>
+  </p:cSld>
+  <p:clrMapOvr>
+    <a:masterClrMapping/>
+  </p:clrMapOvr>
+</p:sld>
+</file>
+
+<file path=ppt/slides/slide15.xml><?xml version="1.0" encoding="utf-8"?>
 <p:sld xmlns:a="http://schemas.openxmlformats.org/drawingml/2006/main" xmlns:p="http://schemas.openxmlformats.org/presentationml/2006/main" xmlns:r="http://schemas.openxmlformats.org/officeDocument/2006/relationships">
   <p:cSld>
     <p:spTree>
@@ -5636,677 +5879,6 @@
                 </a:solidFill>
                 <a:latin typeface="Arial"/>
               </a:rPr>
-              <a:t>13</a:t>
-            </a:r>
-          </a:p>
-        </p:txBody>
-      </p:sp>
-    </p:spTree>
-  </p:cSld>
-  <p:clrMapOvr>
-    <a:masterClrMapping/>
-  </p:clrMapOvr>
-</p:sld>
-</file>
-
-<file path=ppt/slides/slide15.xml><?xml version="1.0" encoding="utf-8"?>
-<p:sld xmlns:a="http://schemas.openxmlformats.org/drawingml/2006/main" xmlns:p="http://schemas.openxmlformats.org/presentationml/2006/main" xmlns:r="http://schemas.openxmlformats.org/officeDocument/2006/relationships">
-  <p:cSld>
-    <p:spTree>
-      <p:nvGrpSpPr>
-        <p:cNvPr id="1" name=""/>
-        <p:cNvGrpSpPr/>
-        <p:nvPr/>
-      </p:nvGrpSpPr>
-      <p:grpSpPr/>
-      <p:sp>
-        <p:nvSpPr>
-          <p:cNvPr id="2" name="TextBox 1"/>
-          <p:cNvSpPr txBox="1"/>
-          <p:nvPr/>
-        </p:nvSpPr>
-        <p:spPr>
-          <a:xfrm>
-            <a:off x="548640" y="274320"/>
-            <a:ext cx="11064240" cy="292608"/>
-          </a:xfrm>
-          <a:prstGeom prst="rect">
-            <a:avLst/>
-          </a:prstGeom>
-          <a:noFill/>
-        </p:spPr>
-        <p:txBody>
-          <a:bodyPr wrap="square" anchor="t">
-            <a:spAutoFit/>
-          </a:bodyPr>
-          <a:lstStyle/>
-          <a:p>
-            <a:pPr algn="l">
-              <a:lnSpc>
-                <a:spcPct val="115000"/>
-              </a:lnSpc>
-            </a:pPr>
-            <a:r>
-              <a:rPr sz="1200" b="0">
-                <a:solidFill>
-                  <a:srgbClr val="000000"/>
-                </a:solidFill>
-                <a:latin typeface="Arial"/>
-              </a:rPr>
-              <a:t>Parte II · LSH</a:t>
-            </a:r>
-          </a:p>
-        </p:txBody>
-      </p:sp>
-      <p:sp>
-        <p:nvSpPr>
-          <p:cNvPr id="3" name="TextBox 2"/>
-          <p:cNvSpPr txBox="1"/>
-          <p:nvPr/>
-        </p:nvSpPr>
-        <p:spPr>
-          <a:xfrm>
-            <a:off x="548640" y="566928"/>
-            <a:ext cx="11064240" cy="731520"/>
-          </a:xfrm>
-          <a:prstGeom prst="rect">
-            <a:avLst/>
-          </a:prstGeom>
-          <a:noFill/>
-        </p:spPr>
-        <p:txBody>
-          <a:bodyPr wrap="square" anchor="t">
-            <a:spAutoFit/>
-          </a:bodyPr>
-          <a:lstStyle/>
-          <a:p>
-            <a:pPr algn="l">
-              <a:lnSpc>
-                <a:spcPct val="115000"/>
-              </a:lnSpc>
-            </a:pPr>
-            <a:r>
-              <a:rPr sz="2600" b="1">
-                <a:solidFill>
-                  <a:srgbClr val="000000"/>
-                </a:solidFill>
-                <a:latin typeface="Arial"/>
-              </a:rPr>
-              <a:t>Un caso concreto encontrado por el método</a:t>
-            </a:r>
-          </a:p>
-        </p:txBody>
-      </p:sp>
-      <p:sp>
-        <p:nvSpPr>
-          <p:cNvPr id="4" name="Rectangle 3"/>
-          <p:cNvSpPr/>
-          <p:nvPr/>
-        </p:nvSpPr>
-        <p:spPr>
-          <a:xfrm>
-            <a:off x="548640" y="1298448"/>
-            <a:ext cx="11064240" cy="11430"/>
-          </a:xfrm>
-          <a:prstGeom prst="rect">
-            <a:avLst/>
-          </a:prstGeom>
-          <a:solidFill>
-            <a:srgbClr val="BBBBBB"/>
-          </a:solidFill>
-          <a:ln>
-            <a:noFill/>
-          </a:ln>
-          <a:effectLst/>
-        </p:spPr>
-        <p:style>
-          <a:lnRef idx="1">
-            <a:schemeClr val="accent1"/>
-          </a:lnRef>
-          <a:fillRef idx="3">
-            <a:schemeClr val="accent1"/>
-          </a:fillRef>
-          <a:effectRef idx="2">
-            <a:schemeClr val="accent1"/>
-          </a:effectRef>
-          <a:fontRef idx="minor">
-            <a:schemeClr val="lt1"/>
-          </a:fontRef>
-        </p:style>
-        <p:txBody>
-          <a:bodyPr rtlCol="0" anchor="ctr"/>
-          <a:lstStyle/>
-          <a:p>
-            <a:pPr algn="ctr"/>
-          </a:p>
-        </p:txBody>
-      </p:sp>
-      <p:graphicFrame>
-        <p:nvGraphicFramePr>
-          <p:cNvPr id="5" name="Table 4"/>
-          <p:cNvGraphicFramePr>
-            <a:graphicFrameLocks noGrp="1"/>
-          </p:cNvGraphicFramePr>
-          <p:nvPr/>
-        </p:nvGraphicFramePr>
-        <p:xfrm>
-          <a:off x="548640" y="1600200"/>
-          <a:ext cx="11064239" cy="2304288"/>
-        </p:xfrm>
-        <a:graphic>
-          <a:graphicData uri="http://schemas.openxmlformats.org/drawingml/2006/table">
-            <a:tbl>
-              <a:tblPr>
-                <a:tableStyleId>{5C22544A-7EE6-4342-B048-85BDC9FD1C3A}</a:tableStyleId>
-              </a:tblPr>
-              <a:tblGrid>
-                <a:gridCol w="980375"/>
-                <a:gridCol w="5041932"/>
-                <a:gridCol w="5041932"/>
-              </a:tblGrid>
-              <a:tr h="384048">
-                <a:tc>
-                  <a:txBody>
-                    <a:bodyPr/>
-                    <a:lstStyle/>
-                    <a:p>
-                      <a:pPr algn="l"/>
-                      <a:r>
-                        <a:rPr sz="1300" b="1">
-                          <a:solidFill>
-                            <a:srgbClr val="000000"/>
-                          </a:solidFill>
-                          <a:latin typeface="Arial"/>
-                        </a:rPr>
-                        <a:t>Jaccard</a:t>
-                      </a:r>
-                    </a:p>
-                  </a:txBody>
-                  <a:tcPr marL="64008" marR="64008" marT="27432" marB="27432" anchor="ctr">
-                    <a:solidFill>
-                      <a:srgbClr val="FFFFFF"/>
-                    </a:solidFill>
-                  </a:tcPr>
-                </a:tc>
-                <a:tc>
-                  <a:txBody>
-                    <a:bodyPr/>
-                    <a:lstStyle/>
-                    <a:p>
-                      <a:pPr algn="l"/>
-                      <a:r>
-                        <a:rPr sz="1300" b="1">
-                          <a:solidFill>
-                            <a:srgbClr val="000000"/>
-                          </a:solidFill>
-                          <a:latin typeface="Arial"/>
-                        </a:rPr>
-                        <a:t>Entidad A</a:t>
-                      </a:r>
-                    </a:p>
-                  </a:txBody>
-                  <a:tcPr marL="64008" marR="64008" marT="27432" marB="27432" anchor="ctr">
-                    <a:solidFill>
-                      <a:srgbClr val="FFFFFF"/>
-                    </a:solidFill>
-                  </a:tcPr>
-                </a:tc>
-                <a:tc>
-                  <a:txBody>
-                    <a:bodyPr/>
-                    <a:lstStyle/>
-                    <a:p>
-                      <a:pPr algn="l"/>
-                      <a:r>
-                        <a:rPr sz="1300" b="1">
-                          <a:solidFill>
-                            <a:srgbClr val="000000"/>
-                          </a:solidFill>
-                          <a:latin typeface="Arial"/>
-                        </a:rPr>
-                        <a:t>Entidad B</a:t>
-                      </a:r>
-                    </a:p>
-                  </a:txBody>
-                  <a:tcPr marL="64008" marR="64008" marT="27432" marB="27432" anchor="ctr">
-                    <a:solidFill>
-                      <a:srgbClr val="FFFFFF"/>
-                    </a:solidFill>
-                  </a:tcPr>
-                </a:tc>
-              </a:tr>
-              <a:tr h="384048">
-                <a:tc>
-                  <a:txBody>
-                    <a:bodyPr/>
-                    <a:lstStyle/>
-                    <a:p>
-                      <a:pPr algn="r"/>
-                      <a:r>
-                        <a:rPr sz="1300" b="0">
-                          <a:solidFill>
-                            <a:srgbClr val="000000"/>
-                          </a:solidFill>
-                          <a:latin typeface="Arial"/>
-                        </a:rPr>
-                        <a:t>1,000</a:t>
-                      </a:r>
-                    </a:p>
-                  </a:txBody>
-                  <a:tcPr marL="64008" marR="64008" marT="27432" marB="27432" anchor="ctr">
-                    <a:solidFill>
-                      <a:srgbClr val="FFFFFF"/>
-                    </a:solidFill>
-                  </a:tcPr>
-                </a:tc>
-                <a:tc>
-                  <a:txBody>
-                    <a:bodyPr/>
-                    <a:lstStyle/>
-                    <a:p>
-                      <a:pPr algn="l"/>
-                      <a:r>
-                        <a:rPr sz="1300" b="0">
-                          <a:solidFill>
-                            <a:srgbClr val="000000"/>
-                          </a:solidFill>
-                          <a:latin typeface="Arial"/>
-                        </a:rPr>
-                        <a:t>AUTORIDAD NACIONAL DEL AGUA</a:t>
-                      </a:r>
-                    </a:p>
-                  </a:txBody>
-                  <a:tcPr marL="64008" marR="64008" marT="27432" marB="27432" anchor="ctr">
-                    <a:solidFill>
-                      <a:srgbClr val="FFFFFF"/>
-                    </a:solidFill>
-                  </a:tcPr>
-                </a:tc>
-                <a:tc>
-                  <a:txBody>
-                    <a:bodyPr/>
-                    <a:lstStyle/>
-                    <a:p>
-                      <a:pPr algn="l"/>
-                      <a:r>
-                        <a:rPr sz="1300" b="0">
-                          <a:solidFill>
-                            <a:srgbClr val="000000"/>
-                          </a:solidFill>
-                          <a:latin typeface="Arial"/>
-                        </a:rPr>
-                        <a:t>AUTORIDAD NACIONAL DEL AGUA</a:t>
-                      </a:r>
-                    </a:p>
-                  </a:txBody>
-                  <a:tcPr marL="64008" marR="64008" marT="27432" marB="27432" anchor="ctr">
-                    <a:solidFill>
-                      <a:srgbClr val="FFFFFF"/>
-                    </a:solidFill>
-                  </a:tcPr>
-                </a:tc>
-              </a:tr>
-              <a:tr h="384048">
-                <a:tc>
-                  <a:txBody>
-                    <a:bodyPr/>
-                    <a:lstStyle/>
-                    <a:p>
-                      <a:pPr algn="r"/>
-                      <a:r>
-                        <a:rPr sz="1300" b="0">
-                          <a:solidFill>
-                            <a:srgbClr val="000000"/>
-                          </a:solidFill>
-                          <a:latin typeface="Arial"/>
-                        </a:rPr>
-                        <a:t>1,000</a:t>
-                      </a:r>
-                    </a:p>
-                  </a:txBody>
-                  <a:tcPr marL="64008" marR="64008" marT="27432" marB="27432" anchor="ctr">
-                    <a:solidFill>
-                      <a:srgbClr val="FFFFFF"/>
-                    </a:solidFill>
-                  </a:tcPr>
-                </a:tc>
-                <a:tc>
-                  <a:txBody>
-                    <a:bodyPr/>
-                    <a:lstStyle/>
-                    <a:p>
-                      <a:pPr algn="l"/>
-                      <a:r>
-                        <a:rPr sz="1300" b="0">
-                          <a:solidFill>
-                            <a:srgbClr val="000000"/>
-                          </a:solidFill>
-                          <a:latin typeface="Arial"/>
-                        </a:rPr>
-                        <a:t>CENTRO NACIONAL DE ABASTECIMIENTO D…</a:t>
-                      </a:r>
-                    </a:p>
-                  </a:txBody>
-                  <a:tcPr marL="64008" marR="64008" marT="27432" marB="27432" anchor="ctr">
-                    <a:solidFill>
-                      <a:srgbClr val="FFFFFF"/>
-                    </a:solidFill>
-                  </a:tcPr>
-                </a:tc>
-                <a:tc>
-                  <a:txBody>
-                    <a:bodyPr/>
-                    <a:lstStyle/>
-                    <a:p>
-                      <a:pPr algn="l"/>
-                      <a:r>
-                        <a:rPr sz="1300" b="0">
-                          <a:solidFill>
-                            <a:srgbClr val="000000"/>
-                          </a:solidFill>
-                          <a:latin typeface="Arial"/>
-                        </a:rPr>
-                        <a:t>CENTRO NACIONAL DE ABASTECIMIENTO D…</a:t>
-                      </a:r>
-                    </a:p>
-                  </a:txBody>
-                  <a:tcPr marL="64008" marR="64008" marT="27432" marB="27432" anchor="ctr">
-                    <a:solidFill>
-                      <a:srgbClr val="FFFFFF"/>
-                    </a:solidFill>
-                  </a:tcPr>
-                </a:tc>
-              </a:tr>
-              <a:tr h="384048">
-                <a:tc>
-                  <a:txBody>
-                    <a:bodyPr/>
-                    <a:lstStyle/>
-                    <a:p>
-                      <a:pPr algn="r"/>
-                      <a:r>
-                        <a:rPr sz="1300" b="0">
-                          <a:solidFill>
-                            <a:srgbClr val="000000"/>
-                          </a:solidFill>
-                          <a:latin typeface="Arial"/>
-                        </a:rPr>
-                        <a:t>0,963</a:t>
-                      </a:r>
-                    </a:p>
-                  </a:txBody>
-                  <a:tcPr marL="64008" marR="64008" marT="27432" marB="27432" anchor="ctr">
-                    <a:solidFill>
-                      <a:srgbClr val="FFFFFF"/>
-                    </a:solidFill>
-                  </a:tcPr>
-                </a:tc>
-                <a:tc>
-                  <a:txBody>
-                    <a:bodyPr/>
-                    <a:lstStyle/>
-                    <a:p>
-                      <a:pPr algn="l"/>
-                      <a:r>
-                        <a:rPr sz="1300" b="0">
-                          <a:solidFill>
-                            <a:srgbClr val="000000"/>
-                          </a:solidFill>
-                          <a:latin typeface="Arial"/>
-                        </a:rPr>
-                        <a:t>MUNICIPALIDAD DISTRITAL DE TAMBO DE…</a:t>
-                      </a:r>
-                    </a:p>
-                  </a:txBody>
-                  <a:tcPr marL="64008" marR="64008" marT="27432" marB="27432" anchor="ctr">
-                    <a:solidFill>
-                      <a:srgbClr val="FFFFFF"/>
-                    </a:solidFill>
-                  </a:tcPr>
-                </a:tc>
-                <a:tc>
-                  <a:txBody>
-                    <a:bodyPr/>
-                    <a:lstStyle/>
-                    <a:p>
-                      <a:pPr algn="l"/>
-                      <a:r>
-                        <a:rPr sz="1300" b="0">
-                          <a:solidFill>
-                            <a:srgbClr val="000000"/>
-                          </a:solidFill>
-                          <a:latin typeface="Arial"/>
-                        </a:rPr>
-                        <a:t>MUNICIPALIDAD DISTRITAL DE SAN BART…</a:t>
-                      </a:r>
-                    </a:p>
-                  </a:txBody>
-                  <a:tcPr marL="64008" marR="64008" marT="27432" marB="27432" anchor="ctr">
-                    <a:solidFill>
-                      <a:srgbClr val="FFFFFF"/>
-                    </a:solidFill>
-                  </a:tcPr>
-                </a:tc>
-              </a:tr>
-              <a:tr h="384048">
-                <a:tc>
-                  <a:txBody>
-                    <a:bodyPr/>
-                    <a:lstStyle/>
-                    <a:p>
-                      <a:pPr algn="r"/>
-                      <a:r>
-                        <a:rPr sz="1300" b="0">
-                          <a:solidFill>
-                            <a:srgbClr val="000000"/>
-                          </a:solidFill>
-                          <a:latin typeface="Arial"/>
-                        </a:rPr>
-                        <a:t>0,934</a:t>
-                      </a:r>
-                    </a:p>
-                  </a:txBody>
-                  <a:tcPr marL="64008" marR="64008" marT="27432" marB="27432" anchor="ctr">
-                    <a:solidFill>
-                      <a:srgbClr val="FFFFFF"/>
-                    </a:solidFill>
-                  </a:tcPr>
-                </a:tc>
-                <a:tc>
-                  <a:txBody>
-                    <a:bodyPr/>
-                    <a:lstStyle/>
-                    <a:p>
-                      <a:pPr algn="l"/>
-                      <a:r>
-                        <a:rPr sz="1300" b="0">
-                          <a:solidFill>
-                            <a:srgbClr val="000000"/>
-                          </a:solidFill>
-                          <a:latin typeface="Arial"/>
-                        </a:rPr>
-                        <a:t>UNIDAD EJECUTORA 003 GESTION INTEGR…</a:t>
-                      </a:r>
-                    </a:p>
-                  </a:txBody>
-                  <a:tcPr marL="64008" marR="64008" marT="27432" marB="27432" anchor="ctr">
-                    <a:solidFill>
-                      <a:srgbClr val="FFFFFF"/>
-                    </a:solidFill>
-                  </a:tcPr>
-                </a:tc>
-                <a:tc>
-                  <a:txBody>
-                    <a:bodyPr/>
-                    <a:lstStyle/>
-                    <a:p>
-                      <a:pPr algn="l"/>
-                      <a:r>
-                        <a:rPr sz="1300" b="0">
-                          <a:solidFill>
-                            <a:srgbClr val="000000"/>
-                          </a:solidFill>
-                          <a:latin typeface="Arial"/>
-                        </a:rPr>
-                        <a:t>UNIDAD EJECUTORA 003 GESTION INTEGR…</a:t>
-                      </a:r>
-                    </a:p>
-                  </a:txBody>
-                  <a:tcPr marL="64008" marR="64008" marT="27432" marB="27432" anchor="ctr">
-                    <a:solidFill>
-                      <a:srgbClr val="FFFFFF"/>
-                    </a:solidFill>
-                  </a:tcPr>
-                </a:tc>
-              </a:tr>
-              <a:tr h="384048">
-                <a:tc>
-                  <a:txBody>
-                    <a:bodyPr/>
-                    <a:lstStyle/>
-                    <a:p>
-                      <a:pPr algn="r"/>
-                      <a:r>
-                        <a:rPr sz="1300" b="0">
-                          <a:solidFill>
-                            <a:srgbClr val="000000"/>
-                          </a:solidFill>
-                          <a:latin typeface="Arial"/>
-                        </a:rPr>
-                        <a:t>0,869</a:t>
-                      </a:r>
-                    </a:p>
-                  </a:txBody>
-                  <a:tcPr marL="64008" marR="64008" marT="27432" marB="27432" anchor="ctr">
-                    <a:solidFill>
-                      <a:srgbClr val="FFFFFF"/>
-                    </a:solidFill>
-                  </a:tcPr>
-                </a:tc>
-                <a:tc>
-                  <a:txBody>
-                    <a:bodyPr/>
-                    <a:lstStyle/>
-                    <a:p>
-                      <a:pPr algn="l"/>
-                      <a:r>
-                        <a:rPr sz="1300" b="0">
-                          <a:solidFill>
-                            <a:srgbClr val="000000"/>
-                          </a:solidFill>
-                          <a:latin typeface="Arial"/>
-                        </a:rPr>
-                        <a:t>COMISION DE PROMOCION DEL PERU PARA…</a:t>
-                      </a:r>
-                    </a:p>
-                  </a:txBody>
-                  <a:tcPr marL="64008" marR="64008" marT="27432" marB="27432" anchor="ctr">
-                    <a:solidFill>
-                      <a:srgbClr val="FFFFFF"/>
-                    </a:solidFill>
-                  </a:tcPr>
-                </a:tc>
-                <a:tc>
-                  <a:txBody>
-                    <a:bodyPr/>
-                    <a:lstStyle/>
-                    <a:p>
-                      <a:pPr algn="l"/>
-                      <a:r>
-                        <a:rPr sz="1300" b="0">
-                          <a:solidFill>
-                            <a:srgbClr val="000000"/>
-                          </a:solidFill>
-                          <a:latin typeface="Arial"/>
-                        </a:rPr>
-                        <a:t>COMISION DE PROMOCION DEL PERU PARA…</a:t>
-                      </a:r>
-                    </a:p>
-                  </a:txBody>
-                  <a:tcPr marL="64008" marR="64008" marT="27432" marB="27432" anchor="ctr">
-                    <a:solidFill>
-                      <a:srgbClr val="FFFFFF"/>
-                    </a:solidFill>
-                  </a:tcPr>
-                </a:tc>
-              </a:tr>
-            </a:tbl>
-          </a:graphicData>
-        </a:graphic>
-      </p:graphicFrame>
-      <p:sp>
-        <p:nvSpPr>
-          <p:cNvPr id="6" name="TextBox 5"/>
-          <p:cNvSpPr txBox="1"/>
-          <p:nvPr/>
-        </p:nvSpPr>
-        <p:spPr>
-          <a:xfrm>
-            <a:off x="548640" y="5806440"/>
-            <a:ext cx="11064240" cy="777240"/>
-          </a:xfrm>
-          <a:prstGeom prst="rect">
-            <a:avLst/>
-          </a:prstGeom>
-          <a:noFill/>
-        </p:spPr>
-        <p:txBody>
-          <a:bodyPr wrap="square" anchor="t">
-            <a:spAutoFit/>
-          </a:bodyPr>
-          <a:lstStyle/>
-          <a:p>
-            <a:pPr algn="l">
-              <a:lnSpc>
-                <a:spcPct val="115000"/>
-              </a:lnSpc>
-            </a:pPr>
-            <a:r>
-              <a:rPr sz="1500" b="0">
-                <a:solidFill>
-                  <a:srgbClr val="000000"/>
-                </a:solidFill>
-                <a:latin typeface="Arial"/>
-              </a:rPr>
-              <a:t>Los pares de la misma entidad son reconvocatorias del mismo objeto, y el de Tambo de Mora con San Bartolo son dos municipalidades distintas que comparten el pliego del programa Vaso de Leche, lo que indica una plantilla reutilizada y no una irregularidad.</a:t>
-            </a:r>
-          </a:p>
-        </p:txBody>
-      </p:sp>
-      <p:sp>
-        <p:nvSpPr>
-          <p:cNvPr id="7" name="TextBox 6"/>
-          <p:cNvSpPr txBox="1"/>
-          <p:nvPr/>
-        </p:nvSpPr>
-        <p:spPr>
-          <a:xfrm>
-            <a:off x="11430000" y="6355080"/>
-            <a:ext cx="548640" cy="274320"/>
-          </a:xfrm>
-          <a:prstGeom prst="rect">
-            <a:avLst/>
-          </a:prstGeom>
-          <a:noFill/>
-        </p:spPr>
-        <p:txBody>
-          <a:bodyPr wrap="square" anchor="t">
-            <a:spAutoFit/>
-          </a:bodyPr>
-          <a:lstStyle/>
-          <a:p>
-            <a:pPr algn="l">
-              <a:lnSpc>
-                <a:spcPct val="115000"/>
-              </a:lnSpc>
-            </a:pPr>
-            <a:r>
-              <a:rPr sz="1000" b="0">
-                <a:solidFill>
-                  <a:srgbClr val="000000"/>
-                </a:solidFill>
-                <a:latin typeface="Arial"/>
-              </a:rPr>
               <a:t>14</a:t>
             </a:r>
           </a:p>
@@ -6364,7 +5936,7 @@
                 </a:solidFill>
                 <a:latin typeface="Arial"/>
               </a:rPr>
-              <a:t>Parte III · ANN</a:t>
+              <a:t>Parte II · LSH</a:t>
             </a:r>
           </a:p>
         </p:txBody>
@@ -6403,7 +5975,7 @@
                 </a:solidFill>
                 <a:latin typeface="Arial"/>
               </a:rPr>
-              <a:t>El régimen de medición cambia la conclusión</a:t>
+              <a:t>Un caso concreto encontrado por el método</a:t>
             </a:r>
           </a:p>
         </p:txBody>
@@ -6452,30 +6024,459 @@
           </a:p>
         </p:txBody>
       </p:sp>
-      <p:pic>
-        <p:nvPicPr>
-          <p:cNvPr id="5" name="Picture 4" descr="f24_ann_vs_exacta.png"/>
-          <p:cNvPicPr>
-            <a:picLocks noChangeAspect="1"/>
-          </p:cNvPicPr>
-          <p:nvPr/>
-        </p:nvPicPr>
-        <p:blipFill>
-          <a:blip r:embed="rId2"/>
-          <a:stretch>
-            <a:fillRect/>
-          </a:stretch>
-        </p:blipFill>
-        <p:spPr>
-          <a:xfrm>
-            <a:off x="719332" y="1508760"/>
-            <a:ext cx="10722854" cy="4160520"/>
-          </a:xfrm>
-          <a:prstGeom prst="rect">
-            <a:avLst/>
-          </a:prstGeom>
-        </p:spPr>
-      </p:pic>
+      <p:graphicFrame>
+        <p:nvGraphicFramePr>
+          <p:cNvPr id="5" name="Table 4"/>
+          <p:cNvGraphicFramePr>
+            <a:graphicFrameLocks noGrp="1"/>
+          </p:cNvGraphicFramePr>
+          <p:nvPr/>
+        </p:nvGraphicFramePr>
+        <p:xfrm>
+          <a:off x="548640" y="1600200"/>
+          <a:ext cx="11064239" cy="2304288"/>
+        </p:xfrm>
+        <a:graphic>
+          <a:graphicData uri="http://schemas.openxmlformats.org/drawingml/2006/table">
+            <a:tbl>
+              <a:tblPr>
+                <a:tableStyleId>{5C22544A-7EE6-4342-B048-85BDC9FD1C3A}</a:tableStyleId>
+              </a:tblPr>
+              <a:tblGrid>
+                <a:gridCol w="980375"/>
+                <a:gridCol w="5041932"/>
+                <a:gridCol w="5041932"/>
+              </a:tblGrid>
+              <a:tr h="384048">
+                <a:tc>
+                  <a:txBody>
+                    <a:bodyPr/>
+                    <a:lstStyle/>
+                    <a:p>
+                      <a:pPr algn="l"/>
+                      <a:r>
+                        <a:rPr sz="1300" b="1">
+                          <a:solidFill>
+                            <a:srgbClr val="000000"/>
+                          </a:solidFill>
+                          <a:latin typeface="Arial"/>
+                        </a:rPr>
+                        <a:t>Jaccard</a:t>
+                      </a:r>
+                    </a:p>
+                  </a:txBody>
+                  <a:tcPr marL="64008" marR="64008" marT="27432" marB="27432" anchor="ctr">
+                    <a:solidFill>
+                      <a:srgbClr val="FFFFFF"/>
+                    </a:solidFill>
+                  </a:tcPr>
+                </a:tc>
+                <a:tc>
+                  <a:txBody>
+                    <a:bodyPr/>
+                    <a:lstStyle/>
+                    <a:p>
+                      <a:pPr algn="l"/>
+                      <a:r>
+                        <a:rPr sz="1300" b="1">
+                          <a:solidFill>
+                            <a:srgbClr val="000000"/>
+                          </a:solidFill>
+                          <a:latin typeface="Arial"/>
+                        </a:rPr>
+                        <a:t>Entidad A</a:t>
+                      </a:r>
+                    </a:p>
+                  </a:txBody>
+                  <a:tcPr marL="64008" marR="64008" marT="27432" marB="27432" anchor="ctr">
+                    <a:solidFill>
+                      <a:srgbClr val="FFFFFF"/>
+                    </a:solidFill>
+                  </a:tcPr>
+                </a:tc>
+                <a:tc>
+                  <a:txBody>
+                    <a:bodyPr/>
+                    <a:lstStyle/>
+                    <a:p>
+                      <a:pPr algn="l"/>
+                      <a:r>
+                        <a:rPr sz="1300" b="1">
+                          <a:solidFill>
+                            <a:srgbClr val="000000"/>
+                          </a:solidFill>
+                          <a:latin typeface="Arial"/>
+                        </a:rPr>
+                        <a:t>Entidad B</a:t>
+                      </a:r>
+                    </a:p>
+                  </a:txBody>
+                  <a:tcPr marL="64008" marR="64008" marT="27432" marB="27432" anchor="ctr">
+                    <a:solidFill>
+                      <a:srgbClr val="FFFFFF"/>
+                    </a:solidFill>
+                  </a:tcPr>
+                </a:tc>
+              </a:tr>
+              <a:tr h="384048">
+                <a:tc>
+                  <a:txBody>
+                    <a:bodyPr/>
+                    <a:lstStyle/>
+                    <a:p>
+                      <a:pPr algn="r"/>
+                      <a:r>
+                        <a:rPr sz="1300" b="0">
+                          <a:solidFill>
+                            <a:srgbClr val="000000"/>
+                          </a:solidFill>
+                          <a:latin typeface="Arial"/>
+                        </a:rPr>
+                        <a:t>1,000</a:t>
+                      </a:r>
+                    </a:p>
+                  </a:txBody>
+                  <a:tcPr marL="64008" marR="64008" marT="27432" marB="27432" anchor="ctr">
+                    <a:solidFill>
+                      <a:srgbClr val="FFFFFF"/>
+                    </a:solidFill>
+                  </a:tcPr>
+                </a:tc>
+                <a:tc>
+                  <a:txBody>
+                    <a:bodyPr/>
+                    <a:lstStyle/>
+                    <a:p>
+                      <a:pPr algn="l"/>
+                      <a:r>
+                        <a:rPr sz="1300" b="0">
+                          <a:solidFill>
+                            <a:srgbClr val="000000"/>
+                          </a:solidFill>
+                          <a:latin typeface="Arial"/>
+                        </a:rPr>
+                        <a:t>AUTORIDAD NACIONAL DEL AGUA</a:t>
+                      </a:r>
+                    </a:p>
+                  </a:txBody>
+                  <a:tcPr marL="64008" marR="64008" marT="27432" marB="27432" anchor="ctr">
+                    <a:solidFill>
+                      <a:srgbClr val="FFFFFF"/>
+                    </a:solidFill>
+                  </a:tcPr>
+                </a:tc>
+                <a:tc>
+                  <a:txBody>
+                    <a:bodyPr/>
+                    <a:lstStyle/>
+                    <a:p>
+                      <a:pPr algn="l"/>
+                      <a:r>
+                        <a:rPr sz="1300" b="0">
+                          <a:solidFill>
+                            <a:srgbClr val="000000"/>
+                          </a:solidFill>
+                          <a:latin typeface="Arial"/>
+                        </a:rPr>
+                        <a:t>AUTORIDAD NACIONAL DEL AGUA</a:t>
+                      </a:r>
+                    </a:p>
+                  </a:txBody>
+                  <a:tcPr marL="64008" marR="64008" marT="27432" marB="27432" anchor="ctr">
+                    <a:solidFill>
+                      <a:srgbClr val="FFFFFF"/>
+                    </a:solidFill>
+                  </a:tcPr>
+                </a:tc>
+              </a:tr>
+              <a:tr h="384048">
+                <a:tc>
+                  <a:txBody>
+                    <a:bodyPr/>
+                    <a:lstStyle/>
+                    <a:p>
+                      <a:pPr algn="r"/>
+                      <a:r>
+                        <a:rPr sz="1300" b="0">
+                          <a:solidFill>
+                            <a:srgbClr val="000000"/>
+                          </a:solidFill>
+                          <a:latin typeface="Arial"/>
+                        </a:rPr>
+                        <a:t>1,000</a:t>
+                      </a:r>
+                    </a:p>
+                  </a:txBody>
+                  <a:tcPr marL="64008" marR="64008" marT="27432" marB="27432" anchor="ctr">
+                    <a:solidFill>
+                      <a:srgbClr val="FFFFFF"/>
+                    </a:solidFill>
+                  </a:tcPr>
+                </a:tc>
+                <a:tc>
+                  <a:txBody>
+                    <a:bodyPr/>
+                    <a:lstStyle/>
+                    <a:p>
+                      <a:pPr algn="l"/>
+                      <a:r>
+                        <a:rPr sz="1300" b="0">
+                          <a:solidFill>
+                            <a:srgbClr val="000000"/>
+                          </a:solidFill>
+                          <a:latin typeface="Arial"/>
+                        </a:rPr>
+                        <a:t>CENTRO NACIONAL DE ABASTECIMIENTO D…</a:t>
+                      </a:r>
+                    </a:p>
+                  </a:txBody>
+                  <a:tcPr marL="64008" marR="64008" marT="27432" marB="27432" anchor="ctr">
+                    <a:solidFill>
+                      <a:srgbClr val="FFFFFF"/>
+                    </a:solidFill>
+                  </a:tcPr>
+                </a:tc>
+                <a:tc>
+                  <a:txBody>
+                    <a:bodyPr/>
+                    <a:lstStyle/>
+                    <a:p>
+                      <a:pPr algn="l"/>
+                      <a:r>
+                        <a:rPr sz="1300" b="0">
+                          <a:solidFill>
+                            <a:srgbClr val="000000"/>
+                          </a:solidFill>
+                          <a:latin typeface="Arial"/>
+                        </a:rPr>
+                        <a:t>CENTRO NACIONAL DE ABASTECIMIENTO D…</a:t>
+                      </a:r>
+                    </a:p>
+                  </a:txBody>
+                  <a:tcPr marL="64008" marR="64008" marT="27432" marB="27432" anchor="ctr">
+                    <a:solidFill>
+                      <a:srgbClr val="FFFFFF"/>
+                    </a:solidFill>
+                  </a:tcPr>
+                </a:tc>
+              </a:tr>
+              <a:tr h="384048">
+                <a:tc>
+                  <a:txBody>
+                    <a:bodyPr/>
+                    <a:lstStyle/>
+                    <a:p>
+                      <a:pPr algn="r"/>
+                      <a:r>
+                        <a:rPr sz="1300" b="0">
+                          <a:solidFill>
+                            <a:srgbClr val="000000"/>
+                          </a:solidFill>
+                          <a:latin typeface="Arial"/>
+                        </a:rPr>
+                        <a:t>0,963</a:t>
+                      </a:r>
+                    </a:p>
+                  </a:txBody>
+                  <a:tcPr marL="64008" marR="64008" marT="27432" marB="27432" anchor="ctr">
+                    <a:solidFill>
+                      <a:srgbClr val="FFFFFF"/>
+                    </a:solidFill>
+                  </a:tcPr>
+                </a:tc>
+                <a:tc>
+                  <a:txBody>
+                    <a:bodyPr/>
+                    <a:lstStyle/>
+                    <a:p>
+                      <a:pPr algn="l"/>
+                      <a:r>
+                        <a:rPr sz="1300" b="0">
+                          <a:solidFill>
+                            <a:srgbClr val="000000"/>
+                          </a:solidFill>
+                          <a:latin typeface="Arial"/>
+                        </a:rPr>
+                        <a:t>MUNICIPALIDAD DISTRITAL DE TAMBO DE…</a:t>
+                      </a:r>
+                    </a:p>
+                  </a:txBody>
+                  <a:tcPr marL="64008" marR="64008" marT="27432" marB="27432" anchor="ctr">
+                    <a:solidFill>
+                      <a:srgbClr val="FFFFFF"/>
+                    </a:solidFill>
+                  </a:tcPr>
+                </a:tc>
+                <a:tc>
+                  <a:txBody>
+                    <a:bodyPr/>
+                    <a:lstStyle/>
+                    <a:p>
+                      <a:pPr algn="l"/>
+                      <a:r>
+                        <a:rPr sz="1300" b="0">
+                          <a:solidFill>
+                            <a:srgbClr val="000000"/>
+                          </a:solidFill>
+                          <a:latin typeface="Arial"/>
+                        </a:rPr>
+                        <a:t>MUNICIPALIDAD DISTRITAL DE SAN BART…</a:t>
+                      </a:r>
+                    </a:p>
+                  </a:txBody>
+                  <a:tcPr marL="64008" marR="64008" marT="27432" marB="27432" anchor="ctr">
+                    <a:solidFill>
+                      <a:srgbClr val="FFFFFF"/>
+                    </a:solidFill>
+                  </a:tcPr>
+                </a:tc>
+              </a:tr>
+              <a:tr h="384048">
+                <a:tc>
+                  <a:txBody>
+                    <a:bodyPr/>
+                    <a:lstStyle/>
+                    <a:p>
+                      <a:pPr algn="r"/>
+                      <a:r>
+                        <a:rPr sz="1300" b="0">
+                          <a:solidFill>
+                            <a:srgbClr val="000000"/>
+                          </a:solidFill>
+                          <a:latin typeface="Arial"/>
+                        </a:rPr>
+                        <a:t>0,934</a:t>
+                      </a:r>
+                    </a:p>
+                  </a:txBody>
+                  <a:tcPr marL="64008" marR="64008" marT="27432" marB="27432" anchor="ctr">
+                    <a:solidFill>
+                      <a:srgbClr val="FFFFFF"/>
+                    </a:solidFill>
+                  </a:tcPr>
+                </a:tc>
+                <a:tc>
+                  <a:txBody>
+                    <a:bodyPr/>
+                    <a:lstStyle/>
+                    <a:p>
+                      <a:pPr algn="l"/>
+                      <a:r>
+                        <a:rPr sz="1300" b="0">
+                          <a:solidFill>
+                            <a:srgbClr val="000000"/>
+                          </a:solidFill>
+                          <a:latin typeface="Arial"/>
+                        </a:rPr>
+                        <a:t>UNIDAD EJECUTORA 003 GESTION INTEGR…</a:t>
+                      </a:r>
+                    </a:p>
+                  </a:txBody>
+                  <a:tcPr marL="64008" marR="64008" marT="27432" marB="27432" anchor="ctr">
+                    <a:solidFill>
+                      <a:srgbClr val="FFFFFF"/>
+                    </a:solidFill>
+                  </a:tcPr>
+                </a:tc>
+                <a:tc>
+                  <a:txBody>
+                    <a:bodyPr/>
+                    <a:lstStyle/>
+                    <a:p>
+                      <a:pPr algn="l"/>
+                      <a:r>
+                        <a:rPr sz="1300" b="0">
+                          <a:solidFill>
+                            <a:srgbClr val="000000"/>
+                          </a:solidFill>
+                          <a:latin typeface="Arial"/>
+                        </a:rPr>
+                        <a:t>UNIDAD EJECUTORA 003 GESTION INTEGR…</a:t>
+                      </a:r>
+                    </a:p>
+                  </a:txBody>
+                  <a:tcPr marL="64008" marR="64008" marT="27432" marB="27432" anchor="ctr">
+                    <a:solidFill>
+                      <a:srgbClr val="FFFFFF"/>
+                    </a:solidFill>
+                  </a:tcPr>
+                </a:tc>
+              </a:tr>
+              <a:tr h="384048">
+                <a:tc>
+                  <a:txBody>
+                    <a:bodyPr/>
+                    <a:lstStyle/>
+                    <a:p>
+                      <a:pPr algn="r"/>
+                      <a:r>
+                        <a:rPr sz="1300" b="0">
+                          <a:solidFill>
+                            <a:srgbClr val="000000"/>
+                          </a:solidFill>
+                          <a:latin typeface="Arial"/>
+                        </a:rPr>
+                        <a:t>0,869</a:t>
+                      </a:r>
+                    </a:p>
+                  </a:txBody>
+                  <a:tcPr marL="64008" marR="64008" marT="27432" marB="27432" anchor="ctr">
+                    <a:solidFill>
+                      <a:srgbClr val="FFFFFF"/>
+                    </a:solidFill>
+                  </a:tcPr>
+                </a:tc>
+                <a:tc>
+                  <a:txBody>
+                    <a:bodyPr/>
+                    <a:lstStyle/>
+                    <a:p>
+                      <a:pPr algn="l"/>
+                      <a:r>
+                        <a:rPr sz="1300" b="0">
+                          <a:solidFill>
+                            <a:srgbClr val="000000"/>
+                          </a:solidFill>
+                          <a:latin typeface="Arial"/>
+                        </a:rPr>
+                        <a:t>COMISION DE PROMOCION DEL PERU PARA…</a:t>
+                      </a:r>
+                    </a:p>
+                  </a:txBody>
+                  <a:tcPr marL="64008" marR="64008" marT="27432" marB="27432" anchor="ctr">
+                    <a:solidFill>
+                      <a:srgbClr val="FFFFFF"/>
+                    </a:solidFill>
+                  </a:tcPr>
+                </a:tc>
+                <a:tc>
+                  <a:txBody>
+                    <a:bodyPr/>
+                    <a:lstStyle/>
+                    <a:p>
+                      <a:pPr algn="l"/>
+                      <a:r>
+                        <a:rPr sz="1300" b="0">
+                          <a:solidFill>
+                            <a:srgbClr val="000000"/>
+                          </a:solidFill>
+                          <a:latin typeface="Arial"/>
+                        </a:rPr>
+                        <a:t>COMISION DE PROMOCION DEL PERU PARA…</a:t>
+                      </a:r>
+                    </a:p>
+                  </a:txBody>
+                  <a:tcPr marL="64008" marR="64008" marT="27432" marB="27432" anchor="ctr">
+                    <a:solidFill>
+                      <a:srgbClr val="FFFFFF"/>
+                    </a:solidFill>
+                  </a:tcPr>
+                </a:tc>
+              </a:tr>
+            </a:tbl>
+          </a:graphicData>
+        </a:graphic>
+      </p:graphicFrame>
       <p:sp>
         <p:nvSpPr>
           <p:cNvPr id="6" name="TextBox 5"/>
@@ -6510,7 +6511,7 @@
                 </a:solidFill>
                 <a:latin typeface="Arial"/>
               </a:rPr>
-              <a:t>En lote el índice aproximado no aporta nada, y consulta a consulta HNSW es un orden de magnitud más rápido.</a:t>
+              <a:t>Los pares de la misma entidad son reconvocatorias del mismo objeto, y el de Tambo de Mora con San Bartolo son dos municipalidades distintas que comparten el pliego del programa Vaso de Leche, lo que indica una plantilla reutilizada y no una irregularidad.</a:t>
             </a:r>
           </a:p>
         </p:txBody>
@@ -6645,7 +6646,7 @@
                 </a:solidFill>
                 <a:latin typeface="Arial"/>
               </a:rPr>
-              <a:t>Por qué existen los índices aproximados</a:t>
+              <a:t>El régimen de medición cambia la conclusión</a:t>
             </a:r>
           </a:p>
         </p:txBody>
@@ -6696,7 +6697,7 @@
       </p:sp>
       <p:pic>
         <p:nvPicPr>
-          <p:cNvPr id="5" name="Picture 4" descr="f26_escalado.png"/>
+          <p:cNvPr id="5" name="Picture 4" descr="f24_ann_vs_exacta.png"/>
           <p:cNvPicPr>
             <a:picLocks noChangeAspect="1"/>
           </p:cNvPicPr>
@@ -6710,8 +6711,8 @@
         </p:blipFill>
         <p:spPr>
           <a:xfrm>
-            <a:off x="2445289" y="1508760"/>
-            <a:ext cx="7270940" cy="4160520"/>
+            <a:off x="719332" y="1508760"/>
+            <a:ext cx="10722854" cy="4160520"/>
           </a:xfrm>
           <a:prstGeom prst="rect">
             <a:avLst/>
@@ -6752,7 +6753,7 @@
                 </a:solidFill>
                 <a:latin typeface="Arial"/>
               </a:rPr>
-              <a:t>La búsqueda exacta crece de forma lineal con la base y HNSW casi no crece, así que la ventaja aparece al escalar.</a:t>
+              <a:t>En lote el índice aproximado no aporta nada, y consulta a consulta HNSW es un orden de magnitud más rápido.</a:t>
             </a:r>
           </a:p>
         </p:txBody>
@@ -6848,7 +6849,7 @@
                 </a:solidFill>
                 <a:latin typeface="Arial"/>
               </a:rPr>
-              <a:t>Parte IV · Flujos</a:t>
+              <a:t>Parte III · ANN</a:t>
             </a:r>
           </a:p>
         </p:txBody>
@@ -6887,7 +6888,7 @@
                 </a:solidFill>
                 <a:latin typeface="Arial"/>
               </a:rPr>
-              <a:t>El filtro de Bloom respeta su tasa teórica</a:t>
+              <a:t>Por qué existen los índices aproximados</a:t>
             </a:r>
           </a:p>
         </p:txBody>
@@ -6938,7 +6939,7 @@
       </p:sp>
       <p:pic>
         <p:nvPicPr>
-          <p:cNvPr id="5" name="Picture 4" descr="f29_bloom.png"/>
+          <p:cNvPr id="5" name="Picture 4" descr="f26_escalado.png"/>
           <p:cNvPicPr>
             <a:picLocks noChangeAspect="1"/>
           </p:cNvPicPr>
@@ -6952,8 +6953,8 @@
         </p:blipFill>
         <p:spPr>
           <a:xfrm>
-            <a:off x="2379832" y="1508760"/>
-            <a:ext cx="7401855" cy="4160520"/>
+            <a:off x="2445289" y="1508760"/>
+            <a:ext cx="7270940" cy="4160520"/>
           </a:xfrm>
           <a:prstGeom prst="rect">
             <a:avLst/>
@@ -6994,7 +6995,7 @@
                 </a:solidFill>
                 <a:latin typeface="Arial"/>
               </a:rPr>
-              <a:t>Cada orden de magnitud de precisión cuesta unos diez bits más por elemento, y los falsos negativos son imposibles.</a:t>
+              <a:t>La búsqueda exacta crece de forma lineal con la base y HNSW casi no crece, así que la ventaja aparece al escalar.</a:t>
             </a:r>
           </a:p>
         </p:txBody>
@@ -7129,7 +7130,7 @@
                 </a:solidFill>
                 <a:latin typeface="Arial"/>
               </a:rPr>
-              <a:t>Por qué hacen falta Bloom y Count-Min, no uno de los dos</a:t>
+              <a:t>El filtro de Bloom respeta su tasa teórica</a:t>
             </a:r>
           </a:p>
         </p:txBody>
@@ -7180,7 +7181,7 @@
       </p:sp>
       <p:pic>
         <p:nvPicPr>
-          <p:cNvPr id="5" name="Picture 4" descr="f31_bloom_vs_cms.png"/>
+          <p:cNvPr id="5" name="Picture 4" descr="f29_bloom.png"/>
           <p:cNvPicPr>
             <a:picLocks noChangeAspect="1"/>
           </p:cNvPicPr>
@@ -7194,8 +7195,8 @@
         </p:blipFill>
         <p:spPr>
           <a:xfrm>
-            <a:off x="548640" y="1675481"/>
-            <a:ext cx="11064240" cy="3827077"/>
+            <a:off x="2379832" y="1508760"/>
+            <a:ext cx="7401855" cy="4160520"/>
           </a:xfrm>
           <a:prstGeom prst="rect">
             <a:avLst/>
@@ -7236,7 +7237,7 @@
                 </a:solidFill>
                 <a:latin typeface="Arial"/>
               </a:rPr>
-              <a:t>Con la misma tasa de error, el Count-Min necesita sesenta y cuatro veces más memoria para responder pertenencia.</a:t>
+              <a:t>Cada orden de magnitud de precisión cuesta unos diez bits más por elemento, y los falsos negativos son imposibles.</a:t>
             </a:r>
           </a:p>
         </p:txBody>
@@ -7653,7 +7654,7 @@
                 </a:solidFill>
                 <a:latin typeface="Arial"/>
               </a:rPr>
-              <a:t>DGIM sobre la ventana reciente</a:t>
+              <a:t>Por qué hacen falta Bloom y Count-Min, no uno de los dos</a:t>
             </a:r>
           </a:p>
         </p:txBody>
@@ -7704,7 +7705,7 @@
       </p:sp>
       <p:pic>
         <p:nvPicPr>
-          <p:cNvPr id="5" name="Picture 4" descr="f32_dgim.png"/>
+          <p:cNvPr id="5" name="Picture 4" descr="f31_bloom_vs_cms.png"/>
           <p:cNvPicPr>
             <a:picLocks noChangeAspect="1"/>
           </p:cNvPicPr>
@@ -7718,8 +7719,8 @@
         </p:blipFill>
         <p:spPr>
           <a:xfrm>
-            <a:off x="2096928" y="1508760"/>
-            <a:ext cx="7967662" cy="4160520"/>
+            <a:off x="548640" y="1675481"/>
+            <a:ext cx="11064240" cy="3827077"/>
           </a:xfrm>
           <a:prstGeom prst="rect">
             <a:avLst/>
@@ -7760,7 +7761,7 @@
                 </a:solidFill>
                 <a:latin typeface="Arial"/>
               </a:rPr>
-              <a:t>El peor error observado queda muy por debajo de la cota del cincuenta por ciento que garantizan dos cubos por tamaño.</a:t>
+              <a:t>Con la misma tasa de error, el Count-Min necesita sesenta y cuatro veces más memoria para responder pertenencia.</a:t>
             </a:r>
           </a:p>
         </p:txBody>
@@ -7895,7 +7896,7 @@
                 </a:solidFill>
                 <a:latin typeface="Arial"/>
               </a:rPr>
-              <a:t>El tiempo es la tercera dimensión del compromiso</a:t>
+              <a:t>DGIM sobre la ventana reciente</a:t>
             </a:r>
           </a:p>
         </p:txBody>
@@ -7946,7 +7947,7 @@
       </p:sp>
       <p:pic>
         <p:nvPicPr>
-          <p:cNvPr id="5" name="Picture 4" descr="f38_tiempos_estructuras.png"/>
+          <p:cNvPr id="5" name="Picture 4" descr="f32_dgim.png"/>
           <p:cNvPicPr>
             <a:picLocks noChangeAspect="1"/>
           </p:cNvPicPr>
@@ -7960,8 +7961,8 @@
         </p:blipFill>
         <p:spPr>
           <a:xfrm>
-            <a:off x="1633307" y="1508760"/>
-            <a:ext cx="8894904" cy="4160520"/>
+            <a:off x="2096928" y="1508760"/>
+            <a:ext cx="7967662" cy="4160520"/>
           </a:xfrm>
           <a:prstGeom prst="rect">
             <a:avLst/>
@@ -8002,7 +8003,7 @@
                 </a:solidFill>
                 <a:latin typeface="Arial"/>
               </a:rPr>
-              <a:t>Estas estructuras no ahorran tiempo: cambian memoria por tiempo y por un error acotado.</a:t>
+              <a:t>El peor error observado queda muy por debajo de la cota del cincuenta por ciento que garantizan dos cubos por tamaño.</a:t>
             </a:r>
           </a:p>
         </p:txBody>
@@ -8137,6 +8138,248 @@
                 </a:solidFill>
                 <a:latin typeface="Arial"/>
               </a:rPr>
+              <a:t>El tiempo es la tercera dimensión del compromiso</a:t>
+            </a:r>
+          </a:p>
+        </p:txBody>
+      </p:sp>
+      <p:sp>
+        <p:nvSpPr>
+          <p:cNvPr id="4" name="Rectangle 3"/>
+          <p:cNvSpPr/>
+          <p:nvPr/>
+        </p:nvSpPr>
+        <p:spPr>
+          <a:xfrm>
+            <a:off x="548640" y="1298448"/>
+            <a:ext cx="11064240" cy="11430"/>
+          </a:xfrm>
+          <a:prstGeom prst="rect">
+            <a:avLst/>
+          </a:prstGeom>
+          <a:solidFill>
+            <a:srgbClr val="BBBBBB"/>
+          </a:solidFill>
+          <a:ln>
+            <a:noFill/>
+          </a:ln>
+          <a:effectLst/>
+        </p:spPr>
+        <p:style>
+          <a:lnRef idx="1">
+            <a:schemeClr val="accent1"/>
+          </a:lnRef>
+          <a:fillRef idx="3">
+            <a:schemeClr val="accent1"/>
+          </a:fillRef>
+          <a:effectRef idx="2">
+            <a:schemeClr val="accent1"/>
+          </a:effectRef>
+          <a:fontRef idx="minor">
+            <a:schemeClr val="lt1"/>
+          </a:fontRef>
+        </p:style>
+        <p:txBody>
+          <a:bodyPr rtlCol="0" anchor="ctr"/>
+          <a:lstStyle/>
+          <a:p>
+            <a:pPr algn="ctr"/>
+          </a:p>
+        </p:txBody>
+      </p:sp>
+      <p:pic>
+        <p:nvPicPr>
+          <p:cNvPr id="5" name="Picture 4" descr="f38_tiempos_estructuras.png"/>
+          <p:cNvPicPr>
+            <a:picLocks noChangeAspect="1"/>
+          </p:cNvPicPr>
+          <p:nvPr/>
+        </p:nvPicPr>
+        <p:blipFill>
+          <a:blip r:embed="rId2"/>
+          <a:stretch>
+            <a:fillRect/>
+          </a:stretch>
+        </p:blipFill>
+        <p:spPr>
+          <a:xfrm>
+            <a:off x="1633307" y="1508760"/>
+            <a:ext cx="8894904" cy="4160520"/>
+          </a:xfrm>
+          <a:prstGeom prst="rect">
+            <a:avLst/>
+          </a:prstGeom>
+        </p:spPr>
+      </p:pic>
+      <p:sp>
+        <p:nvSpPr>
+          <p:cNvPr id="6" name="TextBox 5"/>
+          <p:cNvSpPr txBox="1"/>
+          <p:nvPr/>
+        </p:nvSpPr>
+        <p:spPr>
+          <a:xfrm>
+            <a:off x="548640" y="5806440"/>
+            <a:ext cx="11064240" cy="777240"/>
+          </a:xfrm>
+          <a:prstGeom prst="rect">
+            <a:avLst/>
+          </a:prstGeom>
+          <a:noFill/>
+        </p:spPr>
+        <p:txBody>
+          <a:bodyPr wrap="square" anchor="t">
+            <a:spAutoFit/>
+          </a:bodyPr>
+          <a:lstStyle/>
+          <a:p>
+            <a:pPr algn="l">
+              <a:lnSpc>
+                <a:spcPct val="115000"/>
+              </a:lnSpc>
+            </a:pPr>
+            <a:r>
+              <a:rPr sz="1500" b="0">
+                <a:solidFill>
+                  <a:srgbClr val="000000"/>
+                </a:solidFill>
+                <a:latin typeface="Arial"/>
+              </a:rPr>
+              <a:t>Estas estructuras no ahorran tiempo: cambian memoria por tiempo y por un error acotado.</a:t>
+            </a:r>
+          </a:p>
+        </p:txBody>
+      </p:sp>
+      <p:sp>
+        <p:nvSpPr>
+          <p:cNvPr id="7" name="TextBox 6"/>
+          <p:cNvSpPr txBox="1"/>
+          <p:nvPr/>
+        </p:nvSpPr>
+        <p:spPr>
+          <a:xfrm>
+            <a:off x="11430000" y="6355080"/>
+            <a:ext cx="548640" cy="274320"/>
+          </a:xfrm>
+          <a:prstGeom prst="rect">
+            <a:avLst/>
+          </a:prstGeom>
+          <a:noFill/>
+        </p:spPr>
+        <p:txBody>
+          <a:bodyPr wrap="square" anchor="t">
+            <a:spAutoFit/>
+          </a:bodyPr>
+          <a:lstStyle/>
+          <a:p>
+            <a:pPr algn="l">
+              <a:lnSpc>
+                <a:spcPct val="115000"/>
+              </a:lnSpc>
+            </a:pPr>
+            <a:r>
+              <a:rPr sz="1000" b="0">
+                <a:solidFill>
+                  <a:srgbClr val="000000"/>
+                </a:solidFill>
+                <a:latin typeface="Arial"/>
+              </a:rPr>
+              <a:t>21</a:t>
+            </a:r>
+          </a:p>
+        </p:txBody>
+      </p:sp>
+    </p:spTree>
+  </p:cSld>
+  <p:clrMapOvr>
+    <a:masterClrMapping/>
+  </p:clrMapOvr>
+</p:sld>
+</file>
+
+<file path=ppt/slides/slide23.xml><?xml version="1.0" encoding="utf-8"?>
+<p:sld xmlns:a="http://schemas.openxmlformats.org/drawingml/2006/main" xmlns:p="http://schemas.openxmlformats.org/presentationml/2006/main" xmlns:r="http://schemas.openxmlformats.org/officeDocument/2006/relationships">
+  <p:cSld>
+    <p:spTree>
+      <p:nvGrpSpPr>
+        <p:cNvPr id="1" name=""/>
+        <p:cNvGrpSpPr/>
+        <p:nvPr/>
+      </p:nvGrpSpPr>
+      <p:grpSpPr/>
+      <p:sp>
+        <p:nvSpPr>
+          <p:cNvPr id="2" name="TextBox 1"/>
+          <p:cNvSpPr txBox="1"/>
+          <p:nvPr/>
+        </p:nvSpPr>
+        <p:spPr>
+          <a:xfrm>
+            <a:off x="548640" y="274320"/>
+            <a:ext cx="11064240" cy="292608"/>
+          </a:xfrm>
+          <a:prstGeom prst="rect">
+            <a:avLst/>
+          </a:prstGeom>
+          <a:noFill/>
+        </p:spPr>
+        <p:txBody>
+          <a:bodyPr wrap="square" anchor="t">
+            <a:spAutoFit/>
+          </a:bodyPr>
+          <a:lstStyle/>
+          <a:p>
+            <a:pPr algn="l">
+              <a:lnSpc>
+                <a:spcPct val="115000"/>
+              </a:lnSpc>
+            </a:pPr>
+            <a:r>
+              <a:rPr sz="1200" b="0">
+                <a:solidFill>
+                  <a:srgbClr val="000000"/>
+                </a:solidFill>
+                <a:latin typeface="Arial"/>
+              </a:rPr>
+              <a:t>Parte IV · Flujos</a:t>
+            </a:r>
+          </a:p>
+        </p:txBody>
+      </p:sp>
+      <p:sp>
+        <p:nvSpPr>
+          <p:cNvPr id="3" name="TextBox 2"/>
+          <p:cNvSpPr txBox="1"/>
+          <p:nvPr/>
+        </p:nvSpPr>
+        <p:spPr>
+          <a:xfrm>
+            <a:off x="548640" y="566928"/>
+            <a:ext cx="11064240" cy="731520"/>
+          </a:xfrm>
+          <a:prstGeom prst="rect">
+            <a:avLst/>
+          </a:prstGeom>
+          <a:noFill/>
+        </p:spPr>
+        <p:txBody>
+          <a:bodyPr wrap="square" anchor="t">
+            <a:spAutoFit/>
+          </a:bodyPr>
+          <a:lstStyle/>
+          <a:p>
+            <a:pPr algn="l">
+              <a:lnSpc>
+                <a:spcPct val="115000"/>
+              </a:lnSpc>
+            </a:pPr>
+            <a:r>
+              <a:rPr sz="2600" b="1">
+                <a:solidFill>
+                  <a:srgbClr val="000000"/>
+                </a:solidFill>
+                <a:latin typeface="Arial"/>
+              </a:rPr>
               <a:t>Las cinco estructuras, lado a lado</a:t>
             </a:r>
           </a:p>
@@ -8851,248 +9094,6 @@
                 </a:solidFill>
                 <a:latin typeface="Arial"/>
               </a:rPr>
-              <a:t>21</a:t>
-            </a:r>
-          </a:p>
-        </p:txBody>
-      </p:sp>
-    </p:spTree>
-  </p:cSld>
-  <p:clrMapOvr>
-    <a:masterClrMapping/>
-  </p:clrMapOvr>
-</p:sld>
-</file>
-
-<file path=ppt/slides/slide23.xml><?xml version="1.0" encoding="utf-8"?>
-<p:sld xmlns:a="http://schemas.openxmlformats.org/drawingml/2006/main" xmlns:p="http://schemas.openxmlformats.org/presentationml/2006/main" xmlns:r="http://schemas.openxmlformats.org/officeDocument/2006/relationships">
-  <p:cSld>
-    <p:spTree>
-      <p:nvGrpSpPr>
-        <p:cNvPr id="1" name=""/>
-        <p:cNvGrpSpPr/>
-        <p:nvPr/>
-      </p:nvGrpSpPr>
-      <p:grpSpPr/>
-      <p:sp>
-        <p:nvSpPr>
-          <p:cNvPr id="2" name="TextBox 1"/>
-          <p:cNvSpPr txBox="1"/>
-          <p:nvPr/>
-        </p:nvSpPr>
-        <p:spPr>
-          <a:xfrm>
-            <a:off x="548640" y="274320"/>
-            <a:ext cx="11064240" cy="292608"/>
-          </a:xfrm>
-          <a:prstGeom prst="rect">
-            <a:avLst/>
-          </a:prstGeom>
-          <a:noFill/>
-        </p:spPr>
-        <p:txBody>
-          <a:bodyPr wrap="square" anchor="t">
-            <a:spAutoFit/>
-          </a:bodyPr>
-          <a:lstStyle/>
-          <a:p>
-            <a:pPr algn="l">
-              <a:lnSpc>
-                <a:spcPct val="115000"/>
-              </a:lnSpc>
-            </a:pPr>
-            <a:r>
-              <a:rPr sz="1200" b="0">
-                <a:solidFill>
-                  <a:srgbClr val="000000"/>
-                </a:solidFill>
-                <a:latin typeface="Arial"/>
-              </a:rPr>
-              <a:t>Parte V · Reglas</a:t>
-            </a:r>
-          </a:p>
-        </p:txBody>
-      </p:sp>
-      <p:sp>
-        <p:nvSpPr>
-          <p:cNvPr id="3" name="TextBox 2"/>
-          <p:cNvSpPr txBox="1"/>
-          <p:nvPr/>
-        </p:nvSpPr>
-        <p:spPr>
-          <a:xfrm>
-            <a:off x="548640" y="566928"/>
-            <a:ext cx="11064240" cy="731520"/>
-          </a:xfrm>
-          <a:prstGeom prst="rect">
-            <a:avLst/>
-          </a:prstGeom>
-          <a:noFill/>
-        </p:spPr>
-        <p:txBody>
-          <a:bodyPr wrap="square" anchor="t">
-            <a:spAutoFit/>
-          </a:bodyPr>
-          <a:lstStyle/>
-          <a:p>
-            <a:pPr algn="l">
-              <a:lnSpc>
-                <a:spcPct val="115000"/>
-              </a:lnSpc>
-            </a:pPr>
-            <a:r>
-              <a:rPr sz="2600" b="1">
-                <a:solidFill>
-                  <a:srgbClr val="000000"/>
-                </a:solidFill>
-                <a:latin typeface="Arial"/>
-              </a:rPr>
-              <a:t>La definición de transacción era el problema</a:t>
-            </a:r>
-          </a:p>
-        </p:txBody>
-      </p:sp>
-      <p:sp>
-        <p:nvSpPr>
-          <p:cNvPr id="4" name="Rectangle 3"/>
-          <p:cNvSpPr/>
-          <p:nvPr/>
-        </p:nvSpPr>
-        <p:spPr>
-          <a:xfrm>
-            <a:off x="548640" y="1298448"/>
-            <a:ext cx="11064240" cy="11430"/>
-          </a:xfrm>
-          <a:prstGeom prst="rect">
-            <a:avLst/>
-          </a:prstGeom>
-          <a:solidFill>
-            <a:srgbClr val="BBBBBB"/>
-          </a:solidFill>
-          <a:ln>
-            <a:noFill/>
-          </a:ln>
-          <a:effectLst/>
-        </p:spPr>
-        <p:style>
-          <a:lnRef idx="1">
-            <a:schemeClr val="accent1"/>
-          </a:lnRef>
-          <a:fillRef idx="3">
-            <a:schemeClr val="accent1"/>
-          </a:fillRef>
-          <a:effectRef idx="2">
-            <a:schemeClr val="accent1"/>
-          </a:effectRef>
-          <a:fontRef idx="minor">
-            <a:schemeClr val="lt1"/>
-          </a:fontRef>
-        </p:style>
-        <p:txBody>
-          <a:bodyPr rtlCol="0" anchor="ctr"/>
-          <a:lstStyle/>
-          <a:p>
-            <a:pPr algn="ctr"/>
-          </a:p>
-        </p:txBody>
-      </p:sp>
-      <p:pic>
-        <p:nvPicPr>
-          <p:cNvPr id="5" name="Picture 4" descr="f34_definicion_transaccion.png"/>
-          <p:cNvPicPr>
-            <a:picLocks noChangeAspect="1"/>
-          </p:cNvPicPr>
-          <p:nvPr/>
-        </p:nvPicPr>
-        <p:blipFill>
-          <a:blip r:embed="rId2"/>
-          <a:stretch>
-            <a:fillRect/>
-          </a:stretch>
-        </p:blipFill>
-        <p:spPr>
-          <a:xfrm>
-            <a:off x="548640" y="1617904"/>
-            <a:ext cx="11064240" cy="3942231"/>
-          </a:xfrm>
-          <a:prstGeom prst="rect">
-            <a:avLst/>
-          </a:prstGeom>
-        </p:spPr>
-      </p:pic>
-      <p:sp>
-        <p:nvSpPr>
-          <p:cNvPr id="6" name="TextBox 5"/>
-          <p:cNvSpPr txBox="1"/>
-          <p:nvPr/>
-        </p:nvSpPr>
-        <p:spPr>
-          <a:xfrm>
-            <a:off x="548640" y="5806440"/>
-            <a:ext cx="11064240" cy="777240"/>
-          </a:xfrm>
-          <a:prstGeom prst="rect">
-            <a:avLst/>
-          </a:prstGeom>
-          <a:noFill/>
-        </p:spPr>
-        <p:txBody>
-          <a:bodyPr wrap="square" anchor="t">
-            <a:spAutoFit/>
-          </a:bodyPr>
-          <a:lstStyle/>
-          <a:p>
-            <a:pPr algn="l">
-              <a:lnSpc>
-                <a:spcPct val="115000"/>
-              </a:lnSpc>
-            </a:pPr>
-            <a:r>
-              <a:rPr sz="1500" b="0">
-                <a:solidFill>
-                  <a:srgbClr val="000000"/>
-                </a:solidFill>
-                <a:latin typeface="Arial"/>
-              </a:rPr>
-              <a:t>La canasta natural tiene coocurrencia en el 2 por ciento de los procesos, así que se redefine como lo que una entidad compra en un mes.</a:t>
-            </a:r>
-          </a:p>
-        </p:txBody>
-      </p:sp>
-      <p:sp>
-        <p:nvSpPr>
-          <p:cNvPr id="7" name="TextBox 6"/>
-          <p:cNvSpPr txBox="1"/>
-          <p:nvPr/>
-        </p:nvSpPr>
-        <p:spPr>
-          <a:xfrm>
-            <a:off x="11430000" y="6355080"/>
-            <a:ext cx="548640" cy="274320"/>
-          </a:xfrm>
-          <a:prstGeom prst="rect">
-            <a:avLst/>
-          </a:prstGeom>
-          <a:noFill/>
-        </p:spPr>
-        <p:txBody>
-          <a:bodyPr wrap="square" anchor="t">
-            <a:spAutoFit/>
-          </a:bodyPr>
-          <a:lstStyle/>
-          <a:p>
-            <a:pPr algn="l">
-              <a:lnSpc>
-                <a:spcPct val="115000"/>
-              </a:lnSpc>
-            </a:pPr>
-            <a:r>
-              <a:rPr sz="1000" b="0">
-                <a:solidFill>
-                  <a:srgbClr val="000000"/>
-                </a:solidFill>
-                <a:latin typeface="Arial"/>
-              </a:rPr>
               <a:t>22</a:t>
             </a:r>
           </a:p>
@@ -9189,7 +9190,7 @@
                 </a:solidFill>
                 <a:latin typeface="Arial"/>
               </a:rPr>
-              <a:t>Por qué FP-Growth desplazó a A-Priori</a:t>
+              <a:t>La definición de transacción era el problema</a:t>
             </a:r>
           </a:p>
         </p:txBody>
@@ -9240,7 +9241,7 @@
       </p:sp>
       <p:pic>
         <p:nvPicPr>
-          <p:cNvPr id="5" name="Picture 4" descr="f35_apriori_vs_fpgrowth.png"/>
+          <p:cNvPr id="5" name="Picture 4" descr="f34_definicion_transaccion.png"/>
           <p:cNvPicPr>
             <a:picLocks noChangeAspect="1"/>
           </p:cNvPicPr>
@@ -9254,8 +9255,8 @@
         </p:blipFill>
         <p:spPr>
           <a:xfrm>
-            <a:off x="2417843" y="1508760"/>
-            <a:ext cx="7325832" cy="4160520"/>
+            <a:off x="548640" y="1617904"/>
+            <a:ext cx="11064240" cy="3942231"/>
           </a:xfrm>
           <a:prstGeom prst="rect">
             <a:avLst/>
@@ -9296,7 +9297,7 @@
                 </a:solidFill>
                 <a:latin typeface="Arial"/>
               </a:rPr>
-              <a:t>Al bajar el umbral de soporte, A-Priori explota en candidatos y FP-Growth se mantiene plano.</a:t>
+              <a:t>La canasta natural tiene coocurrencia en el 2 por ciento de los procesos, así que se redefine como lo que una entidad compra en un mes.</a:t>
             </a:r>
           </a:p>
         </p:txBody>
@@ -9349,6 +9350,248 @@
 </file>
 
 <file path=ppt/slides/slide25.xml><?xml version="1.0" encoding="utf-8"?>
+<p:sld xmlns:a="http://schemas.openxmlformats.org/drawingml/2006/main" xmlns:p="http://schemas.openxmlformats.org/presentationml/2006/main" xmlns:r="http://schemas.openxmlformats.org/officeDocument/2006/relationships">
+  <p:cSld>
+    <p:spTree>
+      <p:nvGrpSpPr>
+        <p:cNvPr id="1" name=""/>
+        <p:cNvGrpSpPr/>
+        <p:nvPr/>
+      </p:nvGrpSpPr>
+      <p:grpSpPr/>
+      <p:sp>
+        <p:nvSpPr>
+          <p:cNvPr id="2" name="TextBox 1"/>
+          <p:cNvSpPr txBox="1"/>
+          <p:nvPr/>
+        </p:nvSpPr>
+        <p:spPr>
+          <a:xfrm>
+            <a:off x="548640" y="274320"/>
+            <a:ext cx="11064240" cy="292608"/>
+          </a:xfrm>
+          <a:prstGeom prst="rect">
+            <a:avLst/>
+          </a:prstGeom>
+          <a:noFill/>
+        </p:spPr>
+        <p:txBody>
+          <a:bodyPr wrap="square" anchor="t">
+            <a:spAutoFit/>
+          </a:bodyPr>
+          <a:lstStyle/>
+          <a:p>
+            <a:pPr algn="l">
+              <a:lnSpc>
+                <a:spcPct val="115000"/>
+              </a:lnSpc>
+            </a:pPr>
+            <a:r>
+              <a:rPr sz="1200" b="0">
+                <a:solidFill>
+                  <a:srgbClr val="000000"/>
+                </a:solidFill>
+                <a:latin typeface="Arial"/>
+              </a:rPr>
+              <a:t>Parte V · Reglas</a:t>
+            </a:r>
+          </a:p>
+        </p:txBody>
+      </p:sp>
+      <p:sp>
+        <p:nvSpPr>
+          <p:cNvPr id="3" name="TextBox 2"/>
+          <p:cNvSpPr txBox="1"/>
+          <p:nvPr/>
+        </p:nvSpPr>
+        <p:spPr>
+          <a:xfrm>
+            <a:off x="548640" y="566928"/>
+            <a:ext cx="11064240" cy="731520"/>
+          </a:xfrm>
+          <a:prstGeom prst="rect">
+            <a:avLst/>
+          </a:prstGeom>
+          <a:noFill/>
+        </p:spPr>
+        <p:txBody>
+          <a:bodyPr wrap="square" anchor="t">
+            <a:spAutoFit/>
+          </a:bodyPr>
+          <a:lstStyle/>
+          <a:p>
+            <a:pPr algn="l">
+              <a:lnSpc>
+                <a:spcPct val="115000"/>
+              </a:lnSpc>
+            </a:pPr>
+            <a:r>
+              <a:rPr sz="2600" b="1">
+                <a:solidFill>
+                  <a:srgbClr val="000000"/>
+                </a:solidFill>
+                <a:latin typeface="Arial"/>
+              </a:rPr>
+              <a:t>Por qué FP-Growth desplazó a A-Priori</a:t>
+            </a:r>
+          </a:p>
+        </p:txBody>
+      </p:sp>
+      <p:sp>
+        <p:nvSpPr>
+          <p:cNvPr id="4" name="Rectangle 3"/>
+          <p:cNvSpPr/>
+          <p:nvPr/>
+        </p:nvSpPr>
+        <p:spPr>
+          <a:xfrm>
+            <a:off x="548640" y="1298448"/>
+            <a:ext cx="11064240" cy="11430"/>
+          </a:xfrm>
+          <a:prstGeom prst="rect">
+            <a:avLst/>
+          </a:prstGeom>
+          <a:solidFill>
+            <a:srgbClr val="BBBBBB"/>
+          </a:solidFill>
+          <a:ln>
+            <a:noFill/>
+          </a:ln>
+          <a:effectLst/>
+        </p:spPr>
+        <p:style>
+          <a:lnRef idx="1">
+            <a:schemeClr val="accent1"/>
+          </a:lnRef>
+          <a:fillRef idx="3">
+            <a:schemeClr val="accent1"/>
+          </a:fillRef>
+          <a:effectRef idx="2">
+            <a:schemeClr val="accent1"/>
+          </a:effectRef>
+          <a:fontRef idx="minor">
+            <a:schemeClr val="lt1"/>
+          </a:fontRef>
+        </p:style>
+        <p:txBody>
+          <a:bodyPr rtlCol="0" anchor="ctr"/>
+          <a:lstStyle/>
+          <a:p>
+            <a:pPr algn="ctr"/>
+          </a:p>
+        </p:txBody>
+      </p:sp>
+      <p:pic>
+        <p:nvPicPr>
+          <p:cNvPr id="5" name="Picture 4" descr="f35_apriori_vs_fpgrowth.png"/>
+          <p:cNvPicPr>
+            <a:picLocks noChangeAspect="1"/>
+          </p:cNvPicPr>
+          <p:nvPr/>
+        </p:nvPicPr>
+        <p:blipFill>
+          <a:blip r:embed="rId2"/>
+          <a:stretch>
+            <a:fillRect/>
+          </a:stretch>
+        </p:blipFill>
+        <p:spPr>
+          <a:xfrm>
+            <a:off x="2417843" y="1508760"/>
+            <a:ext cx="7325832" cy="4160520"/>
+          </a:xfrm>
+          <a:prstGeom prst="rect">
+            <a:avLst/>
+          </a:prstGeom>
+        </p:spPr>
+      </p:pic>
+      <p:sp>
+        <p:nvSpPr>
+          <p:cNvPr id="6" name="TextBox 5"/>
+          <p:cNvSpPr txBox="1"/>
+          <p:nvPr/>
+        </p:nvSpPr>
+        <p:spPr>
+          <a:xfrm>
+            <a:off x="548640" y="5806440"/>
+            <a:ext cx="11064240" cy="777240"/>
+          </a:xfrm>
+          <a:prstGeom prst="rect">
+            <a:avLst/>
+          </a:prstGeom>
+          <a:noFill/>
+        </p:spPr>
+        <p:txBody>
+          <a:bodyPr wrap="square" anchor="t">
+            <a:spAutoFit/>
+          </a:bodyPr>
+          <a:lstStyle/>
+          <a:p>
+            <a:pPr algn="l">
+              <a:lnSpc>
+                <a:spcPct val="115000"/>
+              </a:lnSpc>
+            </a:pPr>
+            <a:r>
+              <a:rPr sz="1500" b="0">
+                <a:solidFill>
+                  <a:srgbClr val="000000"/>
+                </a:solidFill>
+                <a:latin typeface="Arial"/>
+              </a:rPr>
+              <a:t>Al bajar el umbral de soporte, A-Priori explota en candidatos y FP-Growth se mantiene plano.</a:t>
+            </a:r>
+          </a:p>
+        </p:txBody>
+      </p:sp>
+      <p:sp>
+        <p:nvSpPr>
+          <p:cNvPr id="7" name="TextBox 6"/>
+          <p:cNvSpPr txBox="1"/>
+          <p:nvPr/>
+        </p:nvSpPr>
+        <p:spPr>
+          <a:xfrm>
+            <a:off x="11430000" y="6355080"/>
+            <a:ext cx="548640" cy="274320"/>
+          </a:xfrm>
+          <a:prstGeom prst="rect">
+            <a:avLst/>
+          </a:prstGeom>
+          <a:noFill/>
+        </p:spPr>
+        <p:txBody>
+          <a:bodyPr wrap="square" anchor="t">
+            <a:spAutoFit/>
+          </a:bodyPr>
+          <a:lstStyle/>
+          <a:p>
+            <a:pPr algn="l">
+              <a:lnSpc>
+                <a:spcPct val="115000"/>
+              </a:lnSpc>
+            </a:pPr>
+            <a:r>
+              <a:rPr sz="1000" b="0">
+                <a:solidFill>
+                  <a:srgbClr val="000000"/>
+                </a:solidFill>
+                <a:latin typeface="Arial"/>
+              </a:rPr>
+              <a:t>24</a:t>
+            </a:r>
+          </a:p>
+        </p:txBody>
+      </p:sp>
+    </p:spTree>
+  </p:cSld>
+  <p:clrMapOvr>
+    <a:masterClrMapping/>
+  </p:clrMapOvr>
+</p:sld>
+</file>
+
+<file path=ppt/slides/slide26.xml><?xml version="1.0" encoding="utf-8"?>
 <p:sld xmlns:a="http://schemas.openxmlformats.org/drawingml/2006/main" xmlns:p="http://schemas.openxmlformats.org/presentationml/2006/main" xmlns:r="http://schemas.openxmlformats.org/officeDocument/2006/relationships">
   <p:cSld>
     <p:spTree>
@@ -10635,248 +10878,6 @@
                 </a:solidFill>
                 <a:latin typeface="Arial"/>
               </a:rPr>
-              <a:t>24</a:t>
-            </a:r>
-          </a:p>
-        </p:txBody>
-      </p:sp>
-    </p:spTree>
-  </p:cSld>
-  <p:clrMapOvr>
-    <a:masterClrMapping/>
-  </p:clrMapOvr>
-</p:sld>
-</file>
-
-<file path=ppt/slides/slide26.xml><?xml version="1.0" encoding="utf-8"?>
-<p:sld xmlns:a="http://schemas.openxmlformats.org/drawingml/2006/main" xmlns:p="http://schemas.openxmlformats.org/presentationml/2006/main" xmlns:r="http://schemas.openxmlformats.org/officeDocument/2006/relationships">
-  <p:cSld>
-    <p:spTree>
-      <p:nvGrpSpPr>
-        <p:cNvPr id="1" name=""/>
-        <p:cNvGrpSpPr/>
-        <p:nvPr/>
-      </p:nvGrpSpPr>
-      <p:grpSpPr/>
-      <p:sp>
-        <p:nvSpPr>
-          <p:cNvPr id="2" name="TextBox 1"/>
-          <p:cNvSpPr txBox="1"/>
-          <p:nvPr/>
-        </p:nvSpPr>
-        <p:spPr>
-          <a:xfrm>
-            <a:off x="548640" y="274320"/>
-            <a:ext cx="11064240" cy="292608"/>
-          </a:xfrm>
-          <a:prstGeom prst="rect">
-            <a:avLst/>
-          </a:prstGeom>
-          <a:noFill/>
-        </p:spPr>
-        <p:txBody>
-          <a:bodyPr wrap="square" anchor="t">
-            <a:spAutoFit/>
-          </a:bodyPr>
-          <a:lstStyle/>
-          <a:p>
-            <a:pPr algn="l">
-              <a:lnSpc>
-                <a:spcPct val="115000"/>
-              </a:lnSpc>
-            </a:pPr>
-            <a:r>
-              <a:rPr sz="1200" b="0">
-                <a:solidFill>
-                  <a:srgbClr val="000000"/>
-                </a:solidFill>
-                <a:latin typeface="Arial"/>
-              </a:rPr>
-              <a:t>Parte V · Reglas</a:t>
-            </a:r>
-          </a:p>
-        </p:txBody>
-      </p:sp>
-      <p:sp>
-        <p:nvSpPr>
-          <p:cNvPr id="3" name="TextBox 2"/>
-          <p:cNvSpPr txBox="1"/>
-          <p:nvPr/>
-        </p:nvSpPr>
-        <p:spPr>
-          <a:xfrm>
-            <a:off x="548640" y="566928"/>
-            <a:ext cx="11064240" cy="731520"/>
-          </a:xfrm>
-          <a:prstGeom prst="rect">
-            <a:avLst/>
-          </a:prstGeom>
-          <a:noFill/>
-        </p:spPr>
-        <p:txBody>
-          <a:bodyPr wrap="square" anchor="t">
-            <a:spAutoFit/>
-          </a:bodyPr>
-          <a:lstStyle/>
-          <a:p>
-            <a:pPr algn="l">
-              <a:lnSpc>
-                <a:spcPct val="115000"/>
-              </a:lnSpc>
-            </a:pPr>
-            <a:r>
-              <a:rPr sz="2600" b="1">
-                <a:solidFill>
-                  <a:srgbClr val="000000"/>
-                </a:solidFill>
-                <a:latin typeface="Arial"/>
-              </a:rPr>
-              <a:t>Dónde se concentra la falta de competencia</a:t>
-            </a:r>
-          </a:p>
-        </p:txBody>
-      </p:sp>
-      <p:sp>
-        <p:nvSpPr>
-          <p:cNvPr id="4" name="Rectangle 3"/>
-          <p:cNvSpPr/>
-          <p:nvPr/>
-        </p:nvSpPr>
-        <p:spPr>
-          <a:xfrm>
-            <a:off x="548640" y="1298448"/>
-            <a:ext cx="11064240" cy="11430"/>
-          </a:xfrm>
-          <a:prstGeom prst="rect">
-            <a:avLst/>
-          </a:prstGeom>
-          <a:solidFill>
-            <a:srgbClr val="BBBBBB"/>
-          </a:solidFill>
-          <a:ln>
-            <a:noFill/>
-          </a:ln>
-          <a:effectLst/>
-        </p:spPr>
-        <p:style>
-          <a:lnRef idx="1">
-            <a:schemeClr val="accent1"/>
-          </a:lnRef>
-          <a:fillRef idx="3">
-            <a:schemeClr val="accent1"/>
-          </a:fillRef>
-          <a:effectRef idx="2">
-            <a:schemeClr val="accent1"/>
-          </a:effectRef>
-          <a:fontRef idx="minor">
-            <a:schemeClr val="lt1"/>
-          </a:fontRef>
-        </p:style>
-        <p:txBody>
-          <a:bodyPr rtlCol="0" anchor="ctr"/>
-          <a:lstStyle/>
-          <a:p>
-            <a:pPr algn="ctr"/>
-          </a:p>
-        </p:txBody>
-      </p:sp>
-      <p:pic>
-        <p:nvPicPr>
-          <p:cNvPr id="5" name="Picture 4" descr="f37_postor_unico.png"/>
-          <p:cNvPicPr>
-            <a:picLocks noChangeAspect="1"/>
-          </p:cNvPicPr>
-          <p:nvPr/>
-        </p:nvPicPr>
-        <p:blipFill>
-          <a:blip r:embed="rId2"/>
-          <a:stretch>
-            <a:fillRect/>
-          </a:stretch>
-        </p:blipFill>
-        <p:spPr>
-          <a:xfrm>
-            <a:off x="2595291" y="1508760"/>
-            <a:ext cx="6970937" cy="4160520"/>
-          </a:xfrm>
-          <a:prstGeom prst="rect">
-            <a:avLst/>
-          </a:prstGeom>
-        </p:spPr>
-      </p:pic>
-      <p:sp>
-        <p:nvSpPr>
-          <p:cNvPr id="6" name="TextBox 5"/>
-          <p:cNvSpPr txBox="1"/>
-          <p:nvPr/>
-        </p:nvSpPr>
-        <p:spPr>
-          <a:xfrm>
-            <a:off x="548640" y="5806440"/>
-            <a:ext cx="11064240" cy="777240"/>
-          </a:xfrm>
-          <a:prstGeom prst="rect">
-            <a:avLst/>
-          </a:prstGeom>
-          <a:noFill/>
-        </p:spPr>
-        <p:txBody>
-          <a:bodyPr wrap="square" anchor="t">
-            <a:spAutoFit/>
-          </a:bodyPr>
-          <a:lstStyle/>
-          <a:p>
-            <a:pPr algn="l">
-              <a:lnSpc>
-                <a:spcPct val="115000"/>
-              </a:lnSpc>
-            </a:pPr>
-            <a:r>
-              <a:rPr sz="1500" b="0">
-                <a:solidFill>
-                  <a:srgbClr val="000000"/>
-                </a:solidFill>
-                <a:latin typeface="Arial"/>
-              </a:rPr>
-              <a:t>El suelo de procesos sin competencia no se reparte al azar, aunque parte de lo que aparece es administrativamente esperable.</a:t>
-            </a:r>
-          </a:p>
-        </p:txBody>
-      </p:sp>
-      <p:sp>
-        <p:nvSpPr>
-          <p:cNvPr id="7" name="TextBox 6"/>
-          <p:cNvSpPr txBox="1"/>
-          <p:nvPr/>
-        </p:nvSpPr>
-        <p:spPr>
-          <a:xfrm>
-            <a:off x="11430000" y="6355080"/>
-            <a:ext cx="548640" cy="274320"/>
-          </a:xfrm>
-          <a:prstGeom prst="rect">
-            <a:avLst/>
-          </a:prstGeom>
-          <a:noFill/>
-        </p:spPr>
-        <p:txBody>
-          <a:bodyPr wrap="square" anchor="t">
-            <a:spAutoFit/>
-          </a:bodyPr>
-          <a:lstStyle/>
-          <a:p>
-            <a:pPr algn="l">
-              <a:lnSpc>
-                <a:spcPct val="115000"/>
-              </a:lnSpc>
-            </a:pPr>
-            <a:r>
-              <a:rPr sz="1000" b="0">
-                <a:solidFill>
-                  <a:srgbClr val="000000"/>
-                </a:solidFill>
-                <a:latin typeface="Arial"/>
-              </a:rPr>
               <a:t>25</a:t>
             </a:r>
           </a:p>
@@ -10934,7 +10935,7 @@
                 </a:solidFill>
                 <a:latin typeface="Arial"/>
               </a:rPr>
-              <a:t>Parte VI · Discusión</a:t>
+              <a:t>Parte V · Reglas</a:t>
             </a:r>
           </a:p>
         </p:txBody>
@@ -10973,7 +10974,7 @@
                 </a:solidFill>
                 <a:latin typeface="Arial"/>
               </a:rPr>
-              <a:t>Qué aportó cada técnica</a:t>
+              <a:t>Dónde se concentra la falta de competencia</a:t>
             </a:r>
           </a:p>
         </p:txBody>
@@ -11022,16 +11023,40 @@
           </a:p>
         </p:txBody>
       </p:sp>
-      <p:sp>
-        <p:nvSpPr>
-          <p:cNvPr id="5" name="TextBox 4"/>
+      <p:pic>
+        <p:nvPicPr>
+          <p:cNvPr id="5" name="Picture 4" descr="f37_postor_unico.png"/>
+          <p:cNvPicPr>
+            <a:picLocks noChangeAspect="1"/>
+          </p:cNvPicPr>
+          <p:nvPr/>
+        </p:nvPicPr>
+        <p:blipFill>
+          <a:blip r:embed="rId2"/>
+          <a:stretch>
+            <a:fillRect/>
+          </a:stretch>
+        </p:blipFill>
+        <p:spPr>
+          <a:xfrm>
+            <a:off x="2595291" y="1508760"/>
+            <a:ext cx="6970937" cy="4160520"/>
+          </a:xfrm>
+          <a:prstGeom prst="rect">
+            <a:avLst/>
+          </a:prstGeom>
+        </p:spPr>
+      </p:pic>
+      <p:sp>
+        <p:nvSpPr>
+          <p:cNvPr id="6" name="TextBox 5"/>
           <p:cNvSpPr txBox="1"/>
           <p:nvPr/>
         </p:nvSpPr>
         <p:spPr>
           <a:xfrm>
-            <a:off x="731520" y="1737360"/>
-            <a:ext cx="10881360" cy="4206240"/>
+            <a:off x="548640" y="5806440"/>
+            <a:ext cx="11064240" cy="777240"/>
           </a:xfrm>
           <a:prstGeom prst="rect">
             <a:avLst/>
@@ -11046,72 +11071,24 @@
           <a:p>
             <a:pPr algn="l">
               <a:lnSpc>
-                <a:spcPct val="190000"/>
+                <a:spcPct val="115000"/>
               </a:lnSpc>
             </a:pPr>
             <a:r>
-              <a:rPr sz="2000" b="0">
+              <a:rPr sz="1500" b="0">
                 <a:solidFill>
                   <a:srgbClr val="000000"/>
                 </a:solidFill>
                 <a:latin typeface="Arial"/>
               </a:rPr>
-              <a:t>•   El EDA y la curva de Lorenz contestan la concentración con un número</a:t>
-            </a:r>
-          </a:p>
-          <a:p>
-            <a:pPr algn="l">
-              <a:lnSpc>
-                <a:spcPct val="190000"/>
-              </a:lnSpc>
-            </a:pPr>
-            <a:r>
-              <a:rPr sz="2000" b="0">
-                <a:solidFill>
-                  <a:srgbClr val="000000"/>
-                </a:solidFill>
-                <a:latin typeface="Arial"/>
-              </a:rPr>
-              <a:t>•   LSH aporta los candidatos de objetos duplicados</a:t>
-            </a:r>
-          </a:p>
-          <a:p>
-            <a:pPr algn="l">
-              <a:lnSpc>
-                <a:spcPct val="190000"/>
-              </a:lnSpc>
-            </a:pPr>
-            <a:r>
-              <a:rPr sz="2000" b="0">
-                <a:solidFill>
-                  <a:srgbClr val="000000"/>
-                </a:solidFill>
-                <a:latin typeface="Arial"/>
-              </a:rPr>
-              <a:t>•   Las reglas contestan dónde se concentra la falta de competencia</a:t>
-            </a:r>
-          </a:p>
-          <a:p>
-            <a:pPr algn="l">
-              <a:lnSpc>
-                <a:spcPct val="190000"/>
-              </a:lnSpc>
-            </a:pPr>
-            <a:r>
-              <a:rPr sz="2000" b="0">
-                <a:solidFill>
-                  <a:srgbClr val="000000"/>
-                </a:solidFill>
-                <a:latin typeface="Arial"/>
-              </a:rPr>
-              <a:t>•   La búsqueda de vecinos aportó poco a las preguntas y mucho al aprendizaje</a:t>
-            </a:r>
-          </a:p>
-        </p:txBody>
-      </p:sp>
-      <p:sp>
-        <p:nvSpPr>
-          <p:cNvPr id="6" name="TextBox 5"/>
+              <a:t>El suelo de procesos sin competencia no se reparte al azar, aunque parte de lo que aparece es administrativamente esperable.</a:t>
+            </a:r>
+          </a:p>
+        </p:txBody>
+      </p:sp>
+      <p:sp>
+        <p:nvSpPr>
+          <p:cNvPr id="7" name="TextBox 6"/>
           <p:cNvSpPr txBox="1"/>
           <p:nvPr/>
         </p:nvSpPr>
@@ -11239,7 +11216,7 @@
                 </a:solidFill>
                 <a:latin typeface="Arial"/>
               </a:rPr>
-              <a:t>Qué se benefició de Spark y qué no</a:t>
+              <a:t>Qué aportó cada técnica</a:t>
             </a:r>
           </a:p>
         </p:txBody>
@@ -11322,7 +11299,7 @@
                 </a:solidFill>
                 <a:latin typeface="Arial"/>
               </a:rPr>
-              <a:t>•   Sí: la ingesta, el EDA y el agrupamiento por bandas de LSH</a:t>
+              <a:t>•   El EDA y la curva de Lorenz contestan la concentración con un número</a:t>
             </a:r>
           </a:p>
           <a:p>
@@ -11338,7 +11315,7 @@
                 </a:solidFill>
                 <a:latin typeface="Arial"/>
               </a:rPr>
-              <a:t>•   No: la búsqueda de vecinos, donde un nodo con FAISS es mejor herramienta</a:t>
+              <a:t>•   LSH aporta los candidatos de objetos duplicados</a:t>
             </a:r>
           </a:p>
           <a:p>
@@ -11354,7 +11331,7 @@
                 </a:solidFill>
                 <a:latin typeface="Arial"/>
               </a:rPr>
-              <a:t>•   No: la minería de flujos, cuyo recorrido es secuencial y con estado</a:t>
+              <a:t>•   Las reglas contestan dónde se concentra la falta de competencia</a:t>
             </a:r>
           </a:p>
           <a:p>
@@ -11370,7 +11347,7 @@
                 </a:solidFill>
                 <a:latin typeface="Arial"/>
               </a:rPr>
-              <a:t>•   Afirmar que todo mejoró con Spark sería falso</a:t>
+              <a:t>•   La búsqueda de vecinos aportó poco a las preguntas y mucho al aprendizaje</a:t>
             </a:r>
           </a:p>
         </p:txBody>
@@ -11505,7 +11482,7 @@
                 </a:solidFill>
                 <a:latin typeface="Arial"/>
               </a:rPr>
-              <a:t>Lo que este trabajo no autoriza a concluir</a:t>
+              <a:t>Qué se benefició de Spark y qué no</a:t>
             </a:r>
           </a:p>
         </p:txBody>
@@ -11588,7 +11565,7 @@
                 </a:solidFill>
                 <a:latin typeface="Arial"/>
               </a:rPr>
-              <a:t>•   Que dos objetos casi idénticos impliquen fraccionamiento o colusión</a:t>
+              <a:t>•   Sí: la ingesta, el EDA y el agrupamiento por bandas de LSH</a:t>
             </a:r>
           </a:p>
           <a:p>
@@ -11604,7 +11581,7 @@
                 </a:solidFill>
                 <a:latin typeface="Arial"/>
               </a:rPr>
-              <a:t>•   Que una concentración alta implique conducta anticompetitiva</a:t>
+              <a:t>•   No: la búsqueda de vecinos, donde un nodo con FAISS es mejor herramienta</a:t>
             </a:r>
           </a:p>
           <a:p>
@@ -11620,7 +11597,7 @@
                 </a:solidFill>
                 <a:latin typeface="Arial"/>
               </a:rPr>
-              <a:t>•   Que una regla con lift alto implique causalidad</a:t>
+              <a:t>•   No: la minería de flujos, cuyo recorrido es secuencial y con estado</a:t>
             </a:r>
           </a:p>
           <a:p>
@@ -11636,7 +11613,7 @@
                 </a:solidFill>
                 <a:latin typeface="Arial"/>
               </a:rPr>
-              <a:t>•   Que estas cifras sean oficiales: describen el paquete descargado</a:t>
+              <a:t>•   Afirmar que todo mejoró con Spark sería falso</a:t>
             </a:r>
           </a:p>
         </p:txBody>
@@ -11732,6 +11709,780 @@
                 </a:solidFill>
                 <a:latin typeface="Arial"/>
               </a:rPr>
+              <a:t>Visión de conjunto</a:t>
+            </a:r>
+          </a:p>
+        </p:txBody>
+      </p:sp>
+      <p:sp>
+        <p:nvSpPr>
+          <p:cNvPr id="3" name="TextBox 2"/>
+          <p:cNvSpPr txBox="1"/>
+          <p:nvPr/>
+        </p:nvSpPr>
+        <p:spPr>
+          <a:xfrm>
+            <a:off x="548640" y="566928"/>
+            <a:ext cx="11064240" cy="731520"/>
+          </a:xfrm>
+          <a:prstGeom prst="rect">
+            <a:avLst/>
+          </a:prstGeom>
+          <a:noFill/>
+        </p:spPr>
+        <p:txBody>
+          <a:bodyPr wrap="square" anchor="t">
+            <a:spAutoFit/>
+          </a:bodyPr>
+          <a:lstStyle/>
+          <a:p>
+            <a:pPr algn="l">
+              <a:lnSpc>
+                <a:spcPct val="115000"/>
+              </a:lnSpc>
+            </a:pPr>
+            <a:r>
+              <a:rPr sz="2600" b="1">
+                <a:solidFill>
+                  <a:srgbClr val="000000"/>
+                </a:solidFill>
+                <a:latin typeface="Arial"/>
+              </a:rPr>
+              <a:t>Cómo encajan las cinco partes</a:t>
+            </a:r>
+          </a:p>
+        </p:txBody>
+      </p:sp>
+      <p:sp>
+        <p:nvSpPr>
+          <p:cNvPr id="4" name="Rectangle 3"/>
+          <p:cNvSpPr/>
+          <p:nvPr/>
+        </p:nvSpPr>
+        <p:spPr>
+          <a:xfrm>
+            <a:off x="548640" y="1298448"/>
+            <a:ext cx="11064240" cy="11430"/>
+          </a:xfrm>
+          <a:prstGeom prst="rect">
+            <a:avLst/>
+          </a:prstGeom>
+          <a:solidFill>
+            <a:srgbClr val="BBBBBB"/>
+          </a:solidFill>
+          <a:ln>
+            <a:noFill/>
+          </a:ln>
+          <a:effectLst/>
+        </p:spPr>
+        <p:style>
+          <a:lnRef idx="1">
+            <a:schemeClr val="accent1"/>
+          </a:lnRef>
+          <a:fillRef idx="3">
+            <a:schemeClr val="accent1"/>
+          </a:fillRef>
+          <a:effectRef idx="2">
+            <a:schemeClr val="accent1"/>
+          </a:effectRef>
+          <a:fontRef idx="minor">
+            <a:schemeClr val="lt1"/>
+          </a:fontRef>
+        </p:style>
+        <p:txBody>
+          <a:bodyPr rtlCol="0" anchor="ctr"/>
+          <a:lstStyle/>
+          <a:p>
+            <a:pPr algn="ctr"/>
+          </a:p>
+        </p:txBody>
+      </p:sp>
+      <p:pic>
+        <p:nvPicPr>
+          <p:cNvPr id="5" name="Picture 4" descr="arquitectura_diapositiva.png"/>
+          <p:cNvPicPr>
+            <a:picLocks noChangeAspect="1"/>
+          </p:cNvPicPr>
+          <p:nvPr/>
+        </p:nvPicPr>
+        <p:blipFill>
+          <a:blip r:embed="rId2"/>
+          <a:stretch>
+            <a:fillRect/>
+          </a:stretch>
+        </p:blipFill>
+        <p:spPr>
+          <a:xfrm>
+            <a:off x="717810" y="1508760"/>
+            <a:ext cx="10725899" cy="4160520"/>
+          </a:xfrm>
+          <a:prstGeom prst="rect">
+            <a:avLst/>
+          </a:prstGeom>
+        </p:spPr>
+      </p:pic>
+      <p:sp>
+        <p:nvSpPr>
+          <p:cNvPr id="6" name="TextBox 5"/>
+          <p:cNvSpPr txBox="1"/>
+          <p:nvPr/>
+        </p:nvSpPr>
+        <p:spPr>
+          <a:xfrm>
+            <a:off x="548640" y="5806440"/>
+            <a:ext cx="11064240" cy="777240"/>
+          </a:xfrm>
+          <a:prstGeom prst="rect">
+            <a:avLst/>
+          </a:prstGeom>
+          <a:noFill/>
+        </p:spPr>
+        <p:txBody>
+          <a:bodyPr wrap="square" anchor="t">
+            <a:spAutoFit/>
+          </a:bodyPr>
+          <a:lstStyle/>
+          <a:p>
+            <a:pPr algn="l">
+              <a:lnSpc>
+                <a:spcPct val="115000"/>
+              </a:lnSpc>
+            </a:pPr>
+            <a:r>
+              <a:rPr sz="1500" b="0">
+                <a:solidFill>
+                  <a:srgbClr val="000000"/>
+                </a:solidFill>
+                <a:latin typeface="Arial"/>
+              </a:rPr>
+              <a:t>Lo único que viaja entre partes es la tabla analítica, de modo que son independientes; las líneas discontinuas marcan la pregunta que una parte deja abierta y otra recoge.</a:t>
+            </a:r>
+          </a:p>
+        </p:txBody>
+      </p:sp>
+      <p:sp>
+        <p:nvSpPr>
+          <p:cNvPr id="7" name="TextBox 6"/>
+          <p:cNvSpPr txBox="1"/>
+          <p:nvPr/>
+        </p:nvSpPr>
+        <p:spPr>
+          <a:xfrm>
+            <a:off x="11430000" y="6355080"/>
+            <a:ext cx="548640" cy="274320"/>
+          </a:xfrm>
+          <a:prstGeom prst="rect">
+            <a:avLst/>
+          </a:prstGeom>
+          <a:noFill/>
+        </p:spPr>
+        <p:txBody>
+          <a:bodyPr wrap="square" anchor="t">
+            <a:spAutoFit/>
+          </a:bodyPr>
+          <a:lstStyle/>
+          <a:p>
+            <a:pPr algn="l">
+              <a:lnSpc>
+                <a:spcPct val="115000"/>
+              </a:lnSpc>
+            </a:pPr>
+            <a:r>
+              <a:rPr sz="1000" b="0">
+                <a:solidFill>
+                  <a:srgbClr val="000000"/>
+                </a:solidFill>
+                <a:latin typeface="Arial"/>
+              </a:rPr>
+              <a:t>2</a:t>
+            </a:r>
+          </a:p>
+        </p:txBody>
+      </p:sp>
+    </p:spTree>
+  </p:cSld>
+  <p:clrMapOvr>
+    <a:masterClrMapping/>
+  </p:clrMapOvr>
+</p:sld>
+</file>
+
+<file path=ppt/slides/slide30.xml><?xml version="1.0" encoding="utf-8"?>
+<p:sld xmlns:a="http://schemas.openxmlformats.org/drawingml/2006/main" xmlns:p="http://schemas.openxmlformats.org/presentationml/2006/main" xmlns:r="http://schemas.openxmlformats.org/officeDocument/2006/relationships">
+  <p:cSld>
+    <p:spTree>
+      <p:nvGrpSpPr>
+        <p:cNvPr id="1" name=""/>
+        <p:cNvGrpSpPr/>
+        <p:nvPr/>
+      </p:nvGrpSpPr>
+      <p:grpSpPr/>
+      <p:sp>
+        <p:nvSpPr>
+          <p:cNvPr id="2" name="TextBox 1"/>
+          <p:cNvSpPr txBox="1"/>
+          <p:nvPr/>
+        </p:nvSpPr>
+        <p:spPr>
+          <a:xfrm>
+            <a:off x="548640" y="274320"/>
+            <a:ext cx="11064240" cy="292608"/>
+          </a:xfrm>
+          <a:prstGeom prst="rect">
+            <a:avLst/>
+          </a:prstGeom>
+          <a:noFill/>
+        </p:spPr>
+        <p:txBody>
+          <a:bodyPr wrap="square" anchor="t">
+            <a:spAutoFit/>
+          </a:bodyPr>
+          <a:lstStyle/>
+          <a:p>
+            <a:pPr algn="l">
+              <a:lnSpc>
+                <a:spcPct val="115000"/>
+              </a:lnSpc>
+            </a:pPr>
+            <a:r>
+              <a:rPr sz="1200" b="0">
+                <a:solidFill>
+                  <a:srgbClr val="000000"/>
+                </a:solidFill>
+                <a:latin typeface="Arial"/>
+              </a:rPr>
+              <a:t>Parte VI · Discusión</a:t>
+            </a:r>
+          </a:p>
+        </p:txBody>
+      </p:sp>
+      <p:sp>
+        <p:nvSpPr>
+          <p:cNvPr id="3" name="TextBox 2"/>
+          <p:cNvSpPr txBox="1"/>
+          <p:nvPr/>
+        </p:nvSpPr>
+        <p:spPr>
+          <a:xfrm>
+            <a:off x="548640" y="566928"/>
+            <a:ext cx="11064240" cy="731520"/>
+          </a:xfrm>
+          <a:prstGeom prst="rect">
+            <a:avLst/>
+          </a:prstGeom>
+          <a:noFill/>
+        </p:spPr>
+        <p:txBody>
+          <a:bodyPr wrap="square" anchor="t">
+            <a:spAutoFit/>
+          </a:bodyPr>
+          <a:lstStyle/>
+          <a:p>
+            <a:pPr algn="l">
+              <a:lnSpc>
+                <a:spcPct val="115000"/>
+              </a:lnSpc>
+            </a:pPr>
+            <a:r>
+              <a:rPr sz="2600" b="1">
+                <a:solidFill>
+                  <a:srgbClr val="000000"/>
+                </a:solidFill>
+                <a:latin typeface="Arial"/>
+              </a:rPr>
+              <a:t>Lo que este trabajo no autoriza a concluir</a:t>
+            </a:r>
+          </a:p>
+        </p:txBody>
+      </p:sp>
+      <p:sp>
+        <p:nvSpPr>
+          <p:cNvPr id="4" name="Rectangle 3"/>
+          <p:cNvSpPr/>
+          <p:nvPr/>
+        </p:nvSpPr>
+        <p:spPr>
+          <a:xfrm>
+            <a:off x="548640" y="1298448"/>
+            <a:ext cx="11064240" cy="11430"/>
+          </a:xfrm>
+          <a:prstGeom prst="rect">
+            <a:avLst/>
+          </a:prstGeom>
+          <a:solidFill>
+            <a:srgbClr val="BBBBBB"/>
+          </a:solidFill>
+          <a:ln>
+            <a:noFill/>
+          </a:ln>
+          <a:effectLst/>
+        </p:spPr>
+        <p:style>
+          <a:lnRef idx="1">
+            <a:schemeClr val="accent1"/>
+          </a:lnRef>
+          <a:fillRef idx="3">
+            <a:schemeClr val="accent1"/>
+          </a:fillRef>
+          <a:effectRef idx="2">
+            <a:schemeClr val="accent1"/>
+          </a:effectRef>
+          <a:fontRef idx="minor">
+            <a:schemeClr val="lt1"/>
+          </a:fontRef>
+        </p:style>
+        <p:txBody>
+          <a:bodyPr rtlCol="0" anchor="ctr"/>
+          <a:lstStyle/>
+          <a:p>
+            <a:pPr algn="ctr"/>
+          </a:p>
+        </p:txBody>
+      </p:sp>
+      <p:sp>
+        <p:nvSpPr>
+          <p:cNvPr id="5" name="TextBox 4"/>
+          <p:cNvSpPr txBox="1"/>
+          <p:nvPr/>
+        </p:nvSpPr>
+        <p:spPr>
+          <a:xfrm>
+            <a:off x="731520" y="1737360"/>
+            <a:ext cx="10881360" cy="4206240"/>
+          </a:xfrm>
+          <a:prstGeom prst="rect">
+            <a:avLst/>
+          </a:prstGeom>
+          <a:noFill/>
+        </p:spPr>
+        <p:txBody>
+          <a:bodyPr wrap="square" anchor="t">
+            <a:spAutoFit/>
+          </a:bodyPr>
+          <a:lstStyle/>
+          <a:p>
+            <a:pPr algn="l">
+              <a:lnSpc>
+                <a:spcPct val="190000"/>
+              </a:lnSpc>
+            </a:pPr>
+            <a:r>
+              <a:rPr sz="2000" b="0">
+                <a:solidFill>
+                  <a:srgbClr val="000000"/>
+                </a:solidFill>
+                <a:latin typeface="Arial"/>
+              </a:rPr>
+              <a:t>•   Que dos objetos casi idénticos impliquen fraccionamiento o colusión</a:t>
+            </a:r>
+          </a:p>
+          <a:p>
+            <a:pPr algn="l">
+              <a:lnSpc>
+                <a:spcPct val="190000"/>
+              </a:lnSpc>
+            </a:pPr>
+            <a:r>
+              <a:rPr sz="2000" b="0">
+                <a:solidFill>
+                  <a:srgbClr val="000000"/>
+                </a:solidFill>
+                <a:latin typeface="Arial"/>
+              </a:rPr>
+              <a:t>•   Que una concentración alta implique conducta anticompetitiva</a:t>
+            </a:r>
+          </a:p>
+          <a:p>
+            <a:pPr algn="l">
+              <a:lnSpc>
+                <a:spcPct val="190000"/>
+              </a:lnSpc>
+            </a:pPr>
+            <a:r>
+              <a:rPr sz="2000" b="0">
+                <a:solidFill>
+                  <a:srgbClr val="000000"/>
+                </a:solidFill>
+                <a:latin typeface="Arial"/>
+              </a:rPr>
+              <a:t>•   Que una regla con lift alto implique causalidad</a:t>
+            </a:r>
+          </a:p>
+          <a:p>
+            <a:pPr algn="l">
+              <a:lnSpc>
+                <a:spcPct val="190000"/>
+              </a:lnSpc>
+            </a:pPr>
+            <a:r>
+              <a:rPr sz="2000" b="0">
+                <a:solidFill>
+                  <a:srgbClr val="000000"/>
+                </a:solidFill>
+                <a:latin typeface="Arial"/>
+              </a:rPr>
+              <a:t>•   Que estas cifras sean oficiales: describen el paquete descargado</a:t>
+            </a:r>
+          </a:p>
+        </p:txBody>
+      </p:sp>
+      <p:sp>
+        <p:nvSpPr>
+          <p:cNvPr id="6" name="TextBox 5"/>
+          <p:cNvSpPr txBox="1"/>
+          <p:nvPr/>
+        </p:nvSpPr>
+        <p:spPr>
+          <a:xfrm>
+            <a:off x="11430000" y="6355080"/>
+            <a:ext cx="548640" cy="274320"/>
+          </a:xfrm>
+          <a:prstGeom prst="rect">
+            <a:avLst/>
+          </a:prstGeom>
+          <a:noFill/>
+        </p:spPr>
+        <p:txBody>
+          <a:bodyPr wrap="square" anchor="t">
+            <a:spAutoFit/>
+          </a:bodyPr>
+          <a:lstStyle/>
+          <a:p>
+            <a:pPr algn="l">
+              <a:lnSpc>
+                <a:spcPct val="115000"/>
+              </a:lnSpc>
+            </a:pPr>
+            <a:r>
+              <a:rPr sz="1000" b="0">
+                <a:solidFill>
+                  <a:srgbClr val="000000"/>
+                </a:solidFill>
+                <a:latin typeface="Arial"/>
+              </a:rPr>
+              <a:t>29</a:t>
+            </a:r>
+          </a:p>
+        </p:txBody>
+      </p:sp>
+    </p:spTree>
+  </p:cSld>
+  <p:clrMapOvr>
+    <a:masterClrMapping/>
+  </p:clrMapOvr>
+</p:sld>
+</file>
+
+<file path=ppt/slides/slide31.xml><?xml version="1.0" encoding="utf-8"?>
+<p:sld xmlns:a="http://schemas.openxmlformats.org/drawingml/2006/main" xmlns:p="http://schemas.openxmlformats.org/presentationml/2006/main" xmlns:r="http://schemas.openxmlformats.org/officeDocument/2006/relationships">
+  <p:cSld>
+    <p:spTree>
+      <p:nvGrpSpPr>
+        <p:cNvPr id="1" name=""/>
+        <p:cNvGrpSpPr/>
+        <p:nvPr/>
+      </p:nvGrpSpPr>
+      <p:grpSpPr/>
+      <p:sp>
+        <p:nvSpPr>
+          <p:cNvPr id="2" name="TextBox 1"/>
+          <p:cNvSpPr txBox="1"/>
+          <p:nvPr/>
+        </p:nvSpPr>
+        <p:spPr>
+          <a:xfrm>
+            <a:off x="548640" y="274320"/>
+            <a:ext cx="11064240" cy="292608"/>
+          </a:xfrm>
+          <a:prstGeom prst="rect">
+            <a:avLst/>
+          </a:prstGeom>
+          <a:noFill/>
+        </p:spPr>
+        <p:txBody>
+          <a:bodyPr wrap="square" anchor="t">
+            <a:spAutoFit/>
+          </a:bodyPr>
+          <a:lstStyle/>
+          <a:p>
+            <a:pPr algn="l">
+              <a:lnSpc>
+                <a:spcPct val="115000"/>
+              </a:lnSpc>
+            </a:pPr>
+            <a:r>
+              <a:rPr sz="1200" b="0">
+                <a:solidFill>
+                  <a:srgbClr val="000000"/>
+                </a:solidFill>
+                <a:latin typeface="Arial"/>
+              </a:rPr>
+              <a:t>Cierre</a:t>
+            </a:r>
+          </a:p>
+        </p:txBody>
+      </p:sp>
+      <p:sp>
+        <p:nvSpPr>
+          <p:cNvPr id="3" name="TextBox 2"/>
+          <p:cNvSpPr txBox="1"/>
+          <p:nvPr/>
+        </p:nvSpPr>
+        <p:spPr>
+          <a:xfrm>
+            <a:off x="548640" y="566928"/>
+            <a:ext cx="11064240" cy="731520"/>
+          </a:xfrm>
+          <a:prstGeom prst="rect">
+            <a:avLst/>
+          </a:prstGeom>
+          <a:noFill/>
+        </p:spPr>
+        <p:txBody>
+          <a:bodyPr wrap="square" anchor="t">
+            <a:spAutoFit/>
+          </a:bodyPr>
+          <a:lstStyle/>
+          <a:p>
+            <a:pPr algn="l">
+              <a:lnSpc>
+                <a:spcPct val="115000"/>
+              </a:lnSpc>
+            </a:pPr>
+            <a:r>
+              <a:rPr sz="2600" b="1">
+                <a:solidFill>
+                  <a:srgbClr val="000000"/>
+                </a:solidFill>
+                <a:latin typeface="Arial"/>
+              </a:rPr>
+              <a:t>Entregables</a:t>
+            </a:r>
+          </a:p>
+        </p:txBody>
+      </p:sp>
+      <p:sp>
+        <p:nvSpPr>
+          <p:cNvPr id="4" name="Rectangle 3"/>
+          <p:cNvSpPr/>
+          <p:nvPr/>
+        </p:nvSpPr>
+        <p:spPr>
+          <a:xfrm>
+            <a:off x="548640" y="1298448"/>
+            <a:ext cx="11064240" cy="11430"/>
+          </a:xfrm>
+          <a:prstGeom prst="rect">
+            <a:avLst/>
+          </a:prstGeom>
+          <a:solidFill>
+            <a:srgbClr val="BBBBBB"/>
+          </a:solidFill>
+          <a:ln>
+            <a:noFill/>
+          </a:ln>
+          <a:effectLst/>
+        </p:spPr>
+        <p:style>
+          <a:lnRef idx="1">
+            <a:schemeClr val="accent1"/>
+          </a:lnRef>
+          <a:fillRef idx="3">
+            <a:schemeClr val="accent1"/>
+          </a:fillRef>
+          <a:effectRef idx="2">
+            <a:schemeClr val="accent1"/>
+          </a:effectRef>
+          <a:fontRef idx="minor">
+            <a:schemeClr val="lt1"/>
+          </a:fontRef>
+        </p:style>
+        <p:txBody>
+          <a:bodyPr rtlCol="0" anchor="ctr"/>
+          <a:lstStyle/>
+          <a:p>
+            <a:pPr algn="ctr"/>
+          </a:p>
+        </p:txBody>
+      </p:sp>
+      <p:sp>
+        <p:nvSpPr>
+          <p:cNvPr id="5" name="TextBox 4"/>
+          <p:cNvSpPr txBox="1"/>
+          <p:nvPr/>
+        </p:nvSpPr>
+        <p:spPr>
+          <a:xfrm>
+            <a:off x="731520" y="1737360"/>
+            <a:ext cx="10881360" cy="4206240"/>
+          </a:xfrm>
+          <a:prstGeom prst="rect">
+            <a:avLst/>
+          </a:prstGeom>
+          <a:noFill/>
+        </p:spPr>
+        <p:txBody>
+          <a:bodyPr wrap="square" anchor="t">
+            <a:spAutoFit/>
+          </a:bodyPr>
+          <a:lstStyle/>
+          <a:p>
+            <a:pPr algn="l">
+              <a:lnSpc>
+                <a:spcPct val="190000"/>
+              </a:lnSpc>
+            </a:pPr>
+            <a:r>
+              <a:rPr sz="2000" b="0">
+                <a:solidFill>
+                  <a:srgbClr val="000000"/>
+                </a:solidFill>
+                <a:latin typeface="Arial"/>
+              </a:rPr>
+              <a:t>•   Seis notebooks ejecutados, uno por parte, con sus módulos de apoyo</a:t>
+            </a:r>
+          </a:p>
+          <a:p>
+            <a:pPr algn="l">
+              <a:lnSpc>
+                <a:spcPct val="190000"/>
+              </a:lnSpc>
+            </a:pPr>
+            <a:r>
+              <a:rPr sz="2000" b="0">
+                <a:solidFill>
+                  <a:srgbClr val="000000"/>
+                </a:solidFill>
+                <a:latin typeface="Arial"/>
+              </a:rPr>
+              <a:t>•   Documento con la justificación detallada de cada decisión</a:t>
+            </a:r>
+          </a:p>
+          <a:p>
+            <a:pPr algn="l">
+              <a:lnSpc>
+                <a:spcPct val="190000"/>
+              </a:lnSpc>
+            </a:pPr>
+            <a:r>
+              <a:rPr sz="2000" b="0">
+                <a:solidFill>
+                  <a:srgbClr val="000000"/>
+                </a:solidFill>
+                <a:latin typeface="Arial"/>
+              </a:rPr>
+              <a:t>•   Informe de seis páginas con la propuesta y los hallazgos</a:t>
+            </a:r>
+          </a:p>
+          <a:p>
+            <a:pPr algn="l">
+              <a:lnSpc>
+                <a:spcPct val="190000"/>
+              </a:lnSpc>
+            </a:pPr>
+            <a:r>
+              <a:rPr sz="2000" b="0">
+                <a:solidFill>
+                  <a:srgbClr val="000000"/>
+                </a:solidFill>
+                <a:latin typeface="Arial"/>
+              </a:rPr>
+              <a:t>•   Reporte web interactivo con quince figuras y seis parámetros ajustables en vivo</a:t>
+            </a:r>
+          </a:p>
+        </p:txBody>
+      </p:sp>
+      <p:sp>
+        <p:nvSpPr>
+          <p:cNvPr id="6" name="TextBox 5"/>
+          <p:cNvSpPr txBox="1"/>
+          <p:nvPr/>
+        </p:nvSpPr>
+        <p:spPr>
+          <a:xfrm>
+            <a:off x="11430000" y="6355080"/>
+            <a:ext cx="548640" cy="274320"/>
+          </a:xfrm>
+          <a:prstGeom prst="rect">
+            <a:avLst/>
+          </a:prstGeom>
+          <a:noFill/>
+        </p:spPr>
+        <p:txBody>
+          <a:bodyPr wrap="square" anchor="t">
+            <a:spAutoFit/>
+          </a:bodyPr>
+          <a:lstStyle/>
+          <a:p>
+            <a:pPr algn="l">
+              <a:lnSpc>
+                <a:spcPct val="115000"/>
+              </a:lnSpc>
+            </a:pPr>
+            <a:r>
+              <a:rPr sz="1000" b="0">
+                <a:solidFill>
+                  <a:srgbClr val="000000"/>
+                </a:solidFill>
+                <a:latin typeface="Arial"/>
+              </a:rPr>
+              <a:t>30</a:t>
+            </a:r>
+          </a:p>
+        </p:txBody>
+      </p:sp>
+    </p:spTree>
+  </p:cSld>
+  <p:clrMapOvr>
+    <a:masterClrMapping/>
+  </p:clrMapOvr>
+</p:sld>
+</file>
+
+<file path=ppt/slides/slide4.xml><?xml version="1.0" encoding="utf-8"?>
+<p:sld xmlns:a="http://schemas.openxmlformats.org/drawingml/2006/main" xmlns:p="http://schemas.openxmlformats.org/presentationml/2006/main" xmlns:r="http://schemas.openxmlformats.org/officeDocument/2006/relationships">
+  <p:cSld>
+    <p:spTree>
+      <p:nvGrpSpPr>
+        <p:cNvPr id="1" name=""/>
+        <p:cNvGrpSpPr/>
+        <p:nvPr/>
+      </p:nvGrpSpPr>
+      <p:grpSpPr/>
+      <p:sp>
+        <p:nvSpPr>
+          <p:cNvPr id="2" name="TextBox 1"/>
+          <p:cNvSpPr txBox="1"/>
+          <p:nvPr/>
+        </p:nvSpPr>
+        <p:spPr>
+          <a:xfrm>
+            <a:off x="548640" y="274320"/>
+            <a:ext cx="11064240" cy="292608"/>
+          </a:xfrm>
+          <a:prstGeom prst="rect">
+            <a:avLst/>
+          </a:prstGeom>
+          <a:noFill/>
+        </p:spPr>
+        <p:txBody>
+          <a:bodyPr wrap="square" anchor="t">
+            <a:spAutoFit/>
+          </a:bodyPr>
+          <a:lstStyle/>
+          <a:p>
+            <a:pPr algn="l">
+              <a:lnSpc>
+                <a:spcPct val="115000"/>
+              </a:lnSpc>
+            </a:pPr>
+            <a:r>
+              <a:rPr sz="1200" b="0">
+                <a:solidFill>
+                  <a:srgbClr val="000000"/>
+                </a:solidFill>
+                <a:latin typeface="Arial"/>
+              </a:rPr>
               <a:t>Parte I · KDD</a:t>
             </a:r>
           </a:p>
@@ -12673,514 +13424,6 @@
                 </a:solidFill>
                 <a:latin typeface="Arial"/>
               </a:rPr>
-              <a:t>2</a:t>
-            </a:r>
-          </a:p>
-        </p:txBody>
-      </p:sp>
-    </p:spTree>
-  </p:cSld>
-  <p:clrMapOvr>
-    <a:masterClrMapping/>
-  </p:clrMapOvr>
-</p:sld>
-</file>
-
-<file path=ppt/slides/slide30.xml><?xml version="1.0" encoding="utf-8"?>
-<p:sld xmlns:a="http://schemas.openxmlformats.org/drawingml/2006/main" xmlns:p="http://schemas.openxmlformats.org/presentationml/2006/main" xmlns:r="http://schemas.openxmlformats.org/officeDocument/2006/relationships">
-  <p:cSld>
-    <p:spTree>
-      <p:nvGrpSpPr>
-        <p:cNvPr id="1" name=""/>
-        <p:cNvGrpSpPr/>
-        <p:nvPr/>
-      </p:nvGrpSpPr>
-      <p:grpSpPr/>
-      <p:sp>
-        <p:nvSpPr>
-          <p:cNvPr id="2" name="TextBox 1"/>
-          <p:cNvSpPr txBox="1"/>
-          <p:nvPr/>
-        </p:nvSpPr>
-        <p:spPr>
-          <a:xfrm>
-            <a:off x="548640" y="274320"/>
-            <a:ext cx="11064240" cy="292608"/>
-          </a:xfrm>
-          <a:prstGeom prst="rect">
-            <a:avLst/>
-          </a:prstGeom>
-          <a:noFill/>
-        </p:spPr>
-        <p:txBody>
-          <a:bodyPr wrap="square" anchor="t">
-            <a:spAutoFit/>
-          </a:bodyPr>
-          <a:lstStyle/>
-          <a:p>
-            <a:pPr algn="l">
-              <a:lnSpc>
-                <a:spcPct val="115000"/>
-              </a:lnSpc>
-            </a:pPr>
-            <a:r>
-              <a:rPr sz="1200" b="0">
-                <a:solidFill>
-                  <a:srgbClr val="000000"/>
-                </a:solidFill>
-                <a:latin typeface="Arial"/>
-              </a:rPr>
-              <a:t>Cierre</a:t>
-            </a:r>
-          </a:p>
-        </p:txBody>
-      </p:sp>
-      <p:sp>
-        <p:nvSpPr>
-          <p:cNvPr id="3" name="TextBox 2"/>
-          <p:cNvSpPr txBox="1"/>
-          <p:nvPr/>
-        </p:nvSpPr>
-        <p:spPr>
-          <a:xfrm>
-            <a:off x="548640" y="566928"/>
-            <a:ext cx="11064240" cy="731520"/>
-          </a:xfrm>
-          <a:prstGeom prst="rect">
-            <a:avLst/>
-          </a:prstGeom>
-          <a:noFill/>
-        </p:spPr>
-        <p:txBody>
-          <a:bodyPr wrap="square" anchor="t">
-            <a:spAutoFit/>
-          </a:bodyPr>
-          <a:lstStyle/>
-          <a:p>
-            <a:pPr algn="l">
-              <a:lnSpc>
-                <a:spcPct val="115000"/>
-              </a:lnSpc>
-            </a:pPr>
-            <a:r>
-              <a:rPr sz="2600" b="1">
-                <a:solidFill>
-                  <a:srgbClr val="000000"/>
-                </a:solidFill>
-                <a:latin typeface="Arial"/>
-              </a:rPr>
-              <a:t>Entregables</a:t>
-            </a:r>
-          </a:p>
-        </p:txBody>
-      </p:sp>
-      <p:sp>
-        <p:nvSpPr>
-          <p:cNvPr id="4" name="Rectangle 3"/>
-          <p:cNvSpPr/>
-          <p:nvPr/>
-        </p:nvSpPr>
-        <p:spPr>
-          <a:xfrm>
-            <a:off x="548640" y="1298448"/>
-            <a:ext cx="11064240" cy="11430"/>
-          </a:xfrm>
-          <a:prstGeom prst="rect">
-            <a:avLst/>
-          </a:prstGeom>
-          <a:solidFill>
-            <a:srgbClr val="BBBBBB"/>
-          </a:solidFill>
-          <a:ln>
-            <a:noFill/>
-          </a:ln>
-          <a:effectLst/>
-        </p:spPr>
-        <p:style>
-          <a:lnRef idx="1">
-            <a:schemeClr val="accent1"/>
-          </a:lnRef>
-          <a:fillRef idx="3">
-            <a:schemeClr val="accent1"/>
-          </a:fillRef>
-          <a:effectRef idx="2">
-            <a:schemeClr val="accent1"/>
-          </a:effectRef>
-          <a:fontRef idx="minor">
-            <a:schemeClr val="lt1"/>
-          </a:fontRef>
-        </p:style>
-        <p:txBody>
-          <a:bodyPr rtlCol="0" anchor="ctr"/>
-          <a:lstStyle/>
-          <a:p>
-            <a:pPr algn="ctr"/>
-          </a:p>
-        </p:txBody>
-      </p:sp>
-      <p:sp>
-        <p:nvSpPr>
-          <p:cNvPr id="5" name="TextBox 4"/>
-          <p:cNvSpPr txBox="1"/>
-          <p:nvPr/>
-        </p:nvSpPr>
-        <p:spPr>
-          <a:xfrm>
-            <a:off x="731520" y="1737360"/>
-            <a:ext cx="10881360" cy="4206240"/>
-          </a:xfrm>
-          <a:prstGeom prst="rect">
-            <a:avLst/>
-          </a:prstGeom>
-          <a:noFill/>
-        </p:spPr>
-        <p:txBody>
-          <a:bodyPr wrap="square" anchor="t">
-            <a:spAutoFit/>
-          </a:bodyPr>
-          <a:lstStyle/>
-          <a:p>
-            <a:pPr algn="l">
-              <a:lnSpc>
-                <a:spcPct val="190000"/>
-              </a:lnSpc>
-            </a:pPr>
-            <a:r>
-              <a:rPr sz="2000" b="0">
-                <a:solidFill>
-                  <a:srgbClr val="000000"/>
-                </a:solidFill>
-                <a:latin typeface="Arial"/>
-              </a:rPr>
-              <a:t>•   Seis notebooks ejecutados, uno por parte, con sus módulos de apoyo</a:t>
-            </a:r>
-          </a:p>
-          <a:p>
-            <a:pPr algn="l">
-              <a:lnSpc>
-                <a:spcPct val="190000"/>
-              </a:lnSpc>
-            </a:pPr>
-            <a:r>
-              <a:rPr sz="2000" b="0">
-                <a:solidFill>
-                  <a:srgbClr val="000000"/>
-                </a:solidFill>
-                <a:latin typeface="Arial"/>
-              </a:rPr>
-              <a:t>•   Documento con la justificación detallada de cada decisión</a:t>
-            </a:r>
-          </a:p>
-          <a:p>
-            <a:pPr algn="l">
-              <a:lnSpc>
-                <a:spcPct val="190000"/>
-              </a:lnSpc>
-            </a:pPr>
-            <a:r>
-              <a:rPr sz="2000" b="0">
-                <a:solidFill>
-                  <a:srgbClr val="000000"/>
-                </a:solidFill>
-                <a:latin typeface="Arial"/>
-              </a:rPr>
-              <a:t>•   Informe de seis páginas con la propuesta y los hallazgos</a:t>
-            </a:r>
-          </a:p>
-          <a:p>
-            <a:pPr algn="l">
-              <a:lnSpc>
-                <a:spcPct val="190000"/>
-              </a:lnSpc>
-            </a:pPr>
-            <a:r>
-              <a:rPr sz="2000" b="0">
-                <a:solidFill>
-                  <a:srgbClr val="000000"/>
-                </a:solidFill>
-                <a:latin typeface="Arial"/>
-              </a:rPr>
-              <a:t>•   Reporte web interactivo con quince figuras y seis parámetros ajustables en vivo</a:t>
-            </a:r>
-          </a:p>
-        </p:txBody>
-      </p:sp>
-      <p:sp>
-        <p:nvSpPr>
-          <p:cNvPr id="6" name="TextBox 5"/>
-          <p:cNvSpPr txBox="1"/>
-          <p:nvPr/>
-        </p:nvSpPr>
-        <p:spPr>
-          <a:xfrm>
-            <a:off x="11430000" y="6355080"/>
-            <a:ext cx="548640" cy="274320"/>
-          </a:xfrm>
-          <a:prstGeom prst="rect">
-            <a:avLst/>
-          </a:prstGeom>
-          <a:noFill/>
-        </p:spPr>
-        <p:txBody>
-          <a:bodyPr wrap="square" anchor="t">
-            <a:spAutoFit/>
-          </a:bodyPr>
-          <a:lstStyle/>
-          <a:p>
-            <a:pPr algn="l">
-              <a:lnSpc>
-                <a:spcPct val="115000"/>
-              </a:lnSpc>
-            </a:pPr>
-            <a:r>
-              <a:rPr sz="1000" b="0">
-                <a:solidFill>
-                  <a:srgbClr val="000000"/>
-                </a:solidFill>
-                <a:latin typeface="Arial"/>
-              </a:rPr>
-              <a:t>29</a:t>
-            </a:r>
-          </a:p>
-        </p:txBody>
-      </p:sp>
-    </p:spTree>
-  </p:cSld>
-  <p:clrMapOvr>
-    <a:masterClrMapping/>
-  </p:clrMapOvr>
-</p:sld>
-</file>
-
-<file path=ppt/slides/slide4.xml><?xml version="1.0" encoding="utf-8"?>
-<p:sld xmlns:a="http://schemas.openxmlformats.org/drawingml/2006/main" xmlns:p="http://schemas.openxmlformats.org/presentationml/2006/main" xmlns:r="http://schemas.openxmlformats.org/officeDocument/2006/relationships">
-  <p:cSld>
-    <p:spTree>
-      <p:nvGrpSpPr>
-        <p:cNvPr id="1" name=""/>
-        <p:cNvGrpSpPr/>
-        <p:nvPr/>
-      </p:nvGrpSpPr>
-      <p:grpSpPr/>
-      <p:sp>
-        <p:nvSpPr>
-          <p:cNvPr id="2" name="TextBox 1"/>
-          <p:cNvSpPr txBox="1"/>
-          <p:nvPr/>
-        </p:nvSpPr>
-        <p:spPr>
-          <a:xfrm>
-            <a:off x="548640" y="274320"/>
-            <a:ext cx="11064240" cy="292608"/>
-          </a:xfrm>
-          <a:prstGeom prst="rect">
-            <a:avLst/>
-          </a:prstGeom>
-          <a:noFill/>
-        </p:spPr>
-        <p:txBody>
-          <a:bodyPr wrap="square" anchor="t">
-            <a:spAutoFit/>
-          </a:bodyPr>
-          <a:lstStyle/>
-          <a:p>
-            <a:pPr algn="l">
-              <a:lnSpc>
-                <a:spcPct val="115000"/>
-              </a:lnSpc>
-            </a:pPr>
-            <a:r>
-              <a:rPr sz="1200" b="0">
-                <a:solidFill>
-                  <a:srgbClr val="000000"/>
-                </a:solidFill>
-                <a:latin typeface="Arial"/>
-              </a:rPr>
-              <a:t>Parte I · KDD</a:t>
-            </a:r>
-          </a:p>
-        </p:txBody>
-      </p:sp>
-      <p:sp>
-        <p:nvSpPr>
-          <p:cNvPr id="3" name="TextBox 2"/>
-          <p:cNvSpPr txBox="1"/>
-          <p:nvPr/>
-        </p:nvSpPr>
-        <p:spPr>
-          <a:xfrm>
-            <a:off x="548640" y="566928"/>
-            <a:ext cx="11064240" cy="731520"/>
-          </a:xfrm>
-          <a:prstGeom prst="rect">
-            <a:avLst/>
-          </a:prstGeom>
-          <a:noFill/>
-        </p:spPr>
-        <p:txBody>
-          <a:bodyPr wrap="square" anchor="t">
-            <a:spAutoFit/>
-          </a:bodyPr>
-          <a:lstStyle/>
-          <a:p>
-            <a:pPr algn="l">
-              <a:lnSpc>
-                <a:spcPct val="115000"/>
-              </a:lnSpc>
-            </a:pPr>
-            <a:r>
-              <a:rPr sz="2600" b="1">
-                <a:solidFill>
-                  <a:srgbClr val="000000"/>
-                </a:solidFill>
-                <a:latin typeface="Arial"/>
-              </a:rPr>
-              <a:t>Dos decisiones cuestan el 37 por ciento de las filas</a:t>
-            </a:r>
-          </a:p>
-        </p:txBody>
-      </p:sp>
-      <p:sp>
-        <p:nvSpPr>
-          <p:cNvPr id="4" name="Rectangle 3"/>
-          <p:cNvSpPr/>
-          <p:nvPr/>
-        </p:nvSpPr>
-        <p:spPr>
-          <a:xfrm>
-            <a:off x="548640" y="1298448"/>
-            <a:ext cx="11064240" cy="11430"/>
-          </a:xfrm>
-          <a:prstGeom prst="rect">
-            <a:avLst/>
-          </a:prstGeom>
-          <a:solidFill>
-            <a:srgbClr val="BBBBBB"/>
-          </a:solidFill>
-          <a:ln>
-            <a:noFill/>
-          </a:ln>
-          <a:effectLst/>
-        </p:spPr>
-        <p:style>
-          <a:lnRef idx="1">
-            <a:schemeClr val="accent1"/>
-          </a:lnRef>
-          <a:fillRef idx="3">
-            <a:schemeClr val="accent1"/>
-          </a:fillRef>
-          <a:effectRef idx="2">
-            <a:schemeClr val="accent1"/>
-          </a:effectRef>
-          <a:fontRef idx="minor">
-            <a:schemeClr val="lt1"/>
-          </a:fontRef>
-        </p:style>
-        <p:txBody>
-          <a:bodyPr rtlCol="0" anchor="ctr"/>
-          <a:lstStyle/>
-          <a:p>
-            <a:pPr algn="ctr"/>
-          </a:p>
-        </p:txBody>
-      </p:sp>
-      <p:pic>
-        <p:nvPicPr>
-          <p:cNvPr id="5" name="Picture 4" descr="f02_embudo.png"/>
-          <p:cNvPicPr>
-            <a:picLocks noChangeAspect="1"/>
-          </p:cNvPicPr>
-          <p:nvPr/>
-        </p:nvPicPr>
-        <p:blipFill>
-          <a:blip r:embed="rId2"/>
-          <a:stretch>
-            <a:fillRect/>
-          </a:stretch>
-        </p:blipFill>
-        <p:spPr>
-          <a:xfrm>
-            <a:off x="1118881" y="1508760"/>
-            <a:ext cx="9923756" cy="4160520"/>
-          </a:xfrm>
-          <a:prstGeom prst="rect">
-            <a:avLst/>
-          </a:prstGeom>
-        </p:spPr>
-      </p:pic>
-      <p:sp>
-        <p:nvSpPr>
-          <p:cNvPr id="6" name="TextBox 5"/>
-          <p:cNvSpPr txBox="1"/>
-          <p:nvPr/>
-        </p:nvSpPr>
-        <p:spPr>
-          <a:xfrm>
-            <a:off x="548640" y="5806440"/>
-            <a:ext cx="11064240" cy="777240"/>
-          </a:xfrm>
-          <a:prstGeom prst="rect">
-            <a:avLst/>
-          </a:prstGeom>
-          <a:noFill/>
-        </p:spPr>
-        <p:txBody>
-          <a:bodyPr wrap="square" anchor="t">
-            <a:spAutoFit/>
-          </a:bodyPr>
-          <a:lstStyle/>
-          <a:p>
-            <a:pPr algn="l">
-              <a:lnSpc>
-                <a:spcPct val="115000"/>
-              </a:lnSpc>
-            </a:pPr>
-            <a:r>
-              <a:rPr sz="1500" b="0">
-                <a:solidFill>
-                  <a:srgbClr val="000000"/>
-                </a:solidFill>
-                <a:latin typeface="Arial"/>
-              </a:rPr>
-              <a:t>Se descartan los montos no positivos, que son campos no publicados, y las convocatorias fuera de la ventana 2023 a 2025.</a:t>
-            </a:r>
-          </a:p>
-        </p:txBody>
-      </p:sp>
-      <p:sp>
-        <p:nvSpPr>
-          <p:cNvPr id="7" name="TextBox 6"/>
-          <p:cNvSpPr txBox="1"/>
-          <p:nvPr/>
-        </p:nvSpPr>
-        <p:spPr>
-          <a:xfrm>
-            <a:off x="11430000" y="6355080"/>
-            <a:ext cx="548640" cy="274320"/>
-          </a:xfrm>
-          <a:prstGeom prst="rect">
-            <a:avLst/>
-          </a:prstGeom>
-          <a:noFill/>
-        </p:spPr>
-        <p:txBody>
-          <a:bodyPr wrap="square" anchor="t">
-            <a:spAutoFit/>
-          </a:bodyPr>
-          <a:lstStyle/>
-          <a:p>
-            <a:pPr algn="l">
-              <a:lnSpc>
-                <a:spcPct val="115000"/>
-              </a:lnSpc>
-            </a:pPr>
-            <a:r>
-              <a:rPr sz="1000" b="0">
-                <a:solidFill>
-                  <a:srgbClr val="000000"/>
-                </a:solidFill>
-                <a:latin typeface="Arial"/>
-              </a:rPr>
               <a:t>3</a:t>
             </a:r>
           </a:p>
@@ -13238,7 +13481,7 @@
                 </a:solidFill>
                 <a:latin typeface="Arial"/>
               </a:rPr>
-              <a:t>Parte I · EDA</a:t>
+              <a:t>Parte I · KDD</a:t>
             </a:r>
           </a:p>
         </p:txBody>
@@ -13277,7 +13520,7 @@
                 </a:solidFill>
                 <a:latin typeface="Arial"/>
               </a:rPr>
-              <a:t>Diciembre es el máximo en los dos años completos</a:t>
+              <a:t>Dos decisiones cuestan el 37 por ciento de las filas</a:t>
             </a:r>
           </a:p>
         </p:txBody>
@@ -13328,7 +13571,7 @@
       </p:sp>
       <p:pic>
         <p:nvPicPr>
-          <p:cNvPr id="5" name="Picture 4" descr="f05_estacionalidad.png"/>
+          <p:cNvPr id="5" name="Picture 4" descr="f02_embudo.png"/>
           <p:cNvPicPr>
             <a:picLocks noChangeAspect="1"/>
           </p:cNvPicPr>
@@ -13342,8 +13585,8 @@
         </p:blipFill>
         <p:spPr>
           <a:xfrm>
-            <a:off x="4622217" y="1508760"/>
-            <a:ext cx="2917085" cy="4160520"/>
+            <a:off x="1118881" y="1508760"/>
+            <a:ext cx="9923756" cy="4160520"/>
           </a:xfrm>
           <a:prstGeom prst="rect">
             <a:avLst/>
@@ -13384,7 +13627,7 @@
                 </a:solidFill>
                 <a:latin typeface="Arial"/>
               </a:rPr>
-              <a:t>El patrón se repite en 2023 y 2024, lo que permite atribuirlo al cierre presupuestal y no al ruido de un año.</a:t>
+              <a:t>Se descartan los montos no positivos, que son campos no publicados, y las convocatorias fuera de la ventana 2023 a 2025.</a:t>
             </a:r>
           </a:p>
         </p:txBody>
@@ -13519,7 +13762,7 @@
                 </a:solidFill>
                 <a:latin typeface="Arial"/>
               </a:rPr>
-              <a:t>El uno por ciento de proveedores concentra el 47 por ciento del monto</a:t>
+              <a:t>Diciembre es el máximo en los dos años completos</a:t>
             </a:r>
           </a:p>
         </p:txBody>
@@ -13570,7 +13813,7 @@
       </p:sp>
       <p:pic>
         <p:nvPicPr>
-          <p:cNvPr id="5" name="Picture 4" descr="f11_lorenz.png"/>
+          <p:cNvPr id="5" name="Picture 4" descr="f05_estacionalidad.png"/>
           <p:cNvPicPr>
             <a:picLocks noChangeAspect="1"/>
           </p:cNvPicPr>
@@ -13584,8 +13827,8 @@
         </p:blipFill>
         <p:spPr>
           <a:xfrm>
-            <a:off x="3808207" y="1508760"/>
-            <a:ext cx="4545105" cy="4160520"/>
+            <a:off x="4622217" y="1508760"/>
+            <a:ext cx="2917085" cy="4160520"/>
           </a:xfrm>
           <a:prstGeom prst="rect">
             <a:avLst/>
@@ -13626,7 +13869,7 @@
                 </a:solidFill>
                 <a:latin typeface="Arial"/>
               </a:rPr>
-              <a:t>El coeficiente de Gini es 0,857 sobre un máximo de 1.</a:t>
+              <a:t>El patrón se repite en 2023 y 2024, lo que permite atribuirlo al cierre presupuestal y no al ruido de un año.</a:t>
             </a:r>
           </a:p>
         </p:txBody>
@@ -13761,7 +14004,7 @@
                 </a:solidFill>
                 <a:latin typeface="Arial"/>
               </a:rPr>
-              <a:t>El Gini nacional no describe a un mercado regional típico</a:t>
+              <a:t>El uno por ciento de proveedores concentra el 47 por ciento del monto</a:t>
             </a:r>
           </a:p>
         </p:txBody>
@@ -13812,7 +14055,7 @@
       </p:sp>
       <p:pic>
         <p:nvPicPr>
-          <p:cNvPr id="5" name="Picture 4" descr="f12_gini_departamento.png"/>
+          <p:cNvPr id="5" name="Picture 4" descr="f11_lorenz.png"/>
           <p:cNvPicPr>
             <a:picLocks noChangeAspect="1"/>
           </p:cNvPicPr>
@@ -13826,8 +14069,8 @@
         </p:blipFill>
         <p:spPr>
           <a:xfrm>
-            <a:off x="3365645" y="1508760"/>
-            <a:ext cx="5430228" cy="4160519"/>
+            <a:off x="3808207" y="1508760"/>
+            <a:ext cx="4545105" cy="4160520"/>
           </a:xfrm>
           <a:prstGeom prst="rect">
             <a:avLst/>
@@ -13868,7 +14111,7 @@
                 </a:solidFill>
                 <a:latin typeface="Arial"/>
               </a:rPr>
-              <a:t>Solo Pasco y Lima superan el valor nacional, y el resto queda por debajo: la cifra del país está empujada por Lima.</a:t>
+              <a:t>El coeficiente de Gini es 0,857 sobre un máximo de 1.</a:t>
             </a:r>
           </a:p>
         </p:txBody>
@@ -14003,7 +14246,7 @@
                 </a:solidFill>
                 <a:latin typeface="Arial"/>
               </a:rPr>
-              <a:t>La falta de competencia tiene dos formas distintas</a:t>
+              <a:t>El Gini nacional no describe a un mercado regional típico</a:t>
             </a:r>
           </a:p>
         </p:txBody>
@@ -14054,7 +14297,7 @@
       </p:sp>
       <p:pic>
         <p:nvPicPr>
-          <p:cNvPr id="5" name="Picture 4" descr="f13_competencia.png"/>
+          <p:cNvPr id="5" name="Picture 4" descr="f12_gini_departamento.png"/>
           <p:cNvPicPr>
             <a:picLocks noChangeAspect="1"/>
           </p:cNvPicPr>
@@ -14068,8 +14311,8 @@
         </p:blipFill>
         <p:spPr>
           <a:xfrm>
-            <a:off x="2539762" y="1508760"/>
-            <a:ext cx="7081994" cy="4160520"/>
+            <a:off x="3365645" y="1508760"/>
+            <a:ext cx="5430228" cy="4160519"/>
           </a:xfrm>
           <a:prstGeom prst="rect">
             <a:avLst/>
@@ -14110,7 +14353,7 @@
                 </a:solidFill>
                 <a:latin typeface="Arial"/>
               </a:rPr>
-              <a:t>Bajo cincuenta mil soles el 57 por ciento tuvo un solo postor, y en el resto de tramos se estabiliza cerca del 10 por ciento.</a:t>
+              <a:t>Solo Pasco y Lima superan el valor nacional, y el resto queda por debajo: la cifra del país está empujada por Lima.</a:t>
             </a:r>
           </a:p>
         </p:txBody>
@@ -14206,7 +14449,7 @@
                 </a:solidFill>
                 <a:latin typeface="Arial"/>
               </a:rPr>
-              <a:t>Parte I · Spark</a:t>
+              <a:t>Parte I · EDA</a:t>
             </a:r>
           </a:p>
         </p:txBody>
@@ -14245,7 +14488,7 @@
                 </a:solidFill>
                 <a:latin typeface="Arial"/>
               </a:rPr>
-              <a:t>MapReduce sobre RDD frente a DataFrames</a:t>
+              <a:t>La falta de competencia tiene dos formas distintas</a:t>
             </a:r>
           </a:p>
         </p:txBody>
@@ -14296,7 +14539,7 @@
       </p:sp>
       <p:pic>
         <p:nvPicPr>
-          <p:cNvPr id="5" name="Picture 4" descr="f14_rdd_vs_dataframe.png"/>
+          <p:cNvPr id="5" name="Picture 4" descr="f13_competencia.png"/>
           <p:cNvPicPr>
             <a:picLocks noChangeAspect="1"/>
           </p:cNvPicPr>
@@ -14310,8 +14553,8 @@
         </p:blipFill>
         <p:spPr>
           <a:xfrm>
-            <a:off x="2589312" y="1508760"/>
-            <a:ext cx="6982895" cy="4160520"/>
+            <a:off x="2539762" y="1508760"/>
+            <a:ext cx="7081994" cy="4160520"/>
           </a:xfrm>
           <a:prstGeom prst="rect">
             <a:avLst/>
@@ -14352,7 +14595,7 @@
                 </a:solidFill>
                 <a:latin typeface="Arial"/>
               </a:rPr>
-              <a:t>El mismo resultado, verificado con exceptAll en ambos sentidos, cuesta tres veces más en RDD por la serialización hacia Python.</a:t>
+              <a:t>Bajo cincuenta mil soles el 57 por ciento tuvo un solo postor, y en el resto de tramos se estabiliza cerca del 10 por ciento.</a:t>
             </a:r>
           </a:p>
         </p:txBody>
